--- a/public/lessons/year-6-maths/spring/week-15/divide-decimals-by-whole-numbers/teaching-powerpoint-v1.pptx
+++ b/public/lessons/year-6-maths/spring/week-15/divide-decimals-by-whole-numbers/teaching-powerpoint-v1.pptx
@@ -2,24 +2,24 @@
 <file path=ppt/presentation.xml><?xml version="1.0" encoding="utf-8"?>
 <p:presentation xmlns:p="http://schemas.openxmlformats.org/presentationml/2006/main">
   <p:sldMasterIdLst>
-    <p:sldMasterId xmlns:r="http://schemas.openxmlformats.org/officeDocument/2006/relationships" id="2147483648" r:id="R67be1a4616034363"/>
+    <p:sldMasterId xmlns:r="http://schemas.openxmlformats.org/officeDocument/2006/relationships" id="2147483648" r:id="R819d60fbaa704626"/>
   </p:sldMasterIdLst>
   <p:notesMasterIdLst>
-    <p:notesMasterId xmlns:r="http://schemas.openxmlformats.org/officeDocument/2006/relationships" r:id="Re990b6a9174e474d"/>
+    <p:notesMasterId xmlns:r="http://schemas.openxmlformats.org/officeDocument/2006/relationships" r:id="R3496c86deb5b4ec8"/>
   </p:notesMasterIdLst>
   <p:sldIdLst>
-    <p:sldId xmlns:r="http://schemas.openxmlformats.org/officeDocument/2006/relationships" id="256" r:id="R1415fb7a9ae644f2"/>
-    <p:sldId xmlns:r="http://schemas.openxmlformats.org/officeDocument/2006/relationships" id="257" r:id="R5c678d827863468a"/>
-    <p:sldId xmlns:r="http://schemas.openxmlformats.org/officeDocument/2006/relationships" id="258" r:id="R33fe42397ce34490"/>
-    <p:sldId xmlns:r="http://schemas.openxmlformats.org/officeDocument/2006/relationships" id="259" r:id="R593f8d4092b04b48"/>
-    <p:sldId xmlns:r="http://schemas.openxmlformats.org/officeDocument/2006/relationships" id="260" r:id="R7ec8938c146546c0"/>
-    <p:sldId xmlns:r="http://schemas.openxmlformats.org/officeDocument/2006/relationships" id="261" r:id="R0a43158f25a34ed6"/>
-    <p:sldId xmlns:r="http://schemas.openxmlformats.org/officeDocument/2006/relationships" id="262" r:id="R6adfb28c043146de"/>
-    <p:sldId xmlns:r="http://schemas.openxmlformats.org/officeDocument/2006/relationships" id="263" r:id="Rbc880d86ccef4e97"/>
-    <p:sldId xmlns:r="http://schemas.openxmlformats.org/officeDocument/2006/relationships" id="264" r:id="R127c48cfb15245f1"/>
-    <p:sldId xmlns:r="http://schemas.openxmlformats.org/officeDocument/2006/relationships" id="265" r:id="R9a1ae6de80304746"/>
-    <p:sldId xmlns:r="http://schemas.openxmlformats.org/officeDocument/2006/relationships" id="266" r:id="R0b1a1edced604bbc"/>
-    <p:sldId xmlns:r="http://schemas.openxmlformats.org/officeDocument/2006/relationships" id="267" r:id="R40c430595c0a45f9"/>
+    <p:sldId xmlns:r="http://schemas.openxmlformats.org/officeDocument/2006/relationships" id="256" r:id="R4495a3fb070044b8"/>
+    <p:sldId xmlns:r="http://schemas.openxmlformats.org/officeDocument/2006/relationships" id="257" r:id="R80692e9768c445b6"/>
+    <p:sldId xmlns:r="http://schemas.openxmlformats.org/officeDocument/2006/relationships" id="258" r:id="Rbca18a27af724085"/>
+    <p:sldId xmlns:r="http://schemas.openxmlformats.org/officeDocument/2006/relationships" id="259" r:id="R2be9f374e4f746a8"/>
+    <p:sldId xmlns:r="http://schemas.openxmlformats.org/officeDocument/2006/relationships" id="260" r:id="Rda13a6f5acb44687"/>
+    <p:sldId xmlns:r="http://schemas.openxmlformats.org/officeDocument/2006/relationships" id="261" r:id="R1eefd0426dd84983"/>
+    <p:sldId xmlns:r="http://schemas.openxmlformats.org/officeDocument/2006/relationships" id="262" r:id="Rf6c33a6a10694ae5"/>
+    <p:sldId xmlns:r="http://schemas.openxmlformats.org/officeDocument/2006/relationships" id="263" r:id="Rf40d217e33aa489d"/>
+    <p:sldId xmlns:r="http://schemas.openxmlformats.org/officeDocument/2006/relationships" id="264" r:id="R49eebfdcce284574"/>
+    <p:sldId xmlns:r="http://schemas.openxmlformats.org/officeDocument/2006/relationships" id="265" r:id="R73095adf904344d5"/>
+    <p:sldId xmlns:r="http://schemas.openxmlformats.org/officeDocument/2006/relationships" id="266" r:id="Rb5eb2668341244ea"/>
+    <p:sldId xmlns:r="http://schemas.openxmlformats.org/officeDocument/2006/relationships" id="267" r:id="R5a2ffd5e96624926"/>
   </p:sldIdLst>
   <p:sldSz cx="12192000" cy="6858000"/>
   <p:notesSz cx="6858000" cy="9144000"/>
@@ -873,7 +873,7 @@
           <a:lstStyle xmlns:a="http://schemas.openxmlformats.org/drawingml/2006/main"/>
           <a:p xmlns:a="http://schemas.openxmlformats.org/drawingml/2006/main">
             <a:r>
-              <a:t>I do. Reveal the question, setup and each calculation stage one click at a time. Pupils watch before copying. Model answer: 3.57.</a:t>
+              <a:t>I do. Reveal the question, then reveal each mathematical change one click at a time. Point to the numbers and operation that changed before moving to the next line. Final answer: 3.57.</a:t>
             </a:r>
           </a:p>
         </p:txBody>
@@ -1291,7 +1291,7 @@
   </p:cSld>
   <p:clrMap bg1="lt1" tx1="dk1" bg2="lt2" tx2="dk2" accent1="accent1" accent2="accent2" accent3="accent3" accent4="accent4" accent5="accent5" accent6="accent6" hlink="hlink" folHlink="folHlink"/>
   <p:sldLayoutIdLst>
-    <p:sldLayoutId xmlns:r="http://schemas.openxmlformats.org/officeDocument/2006/relationships" id="2147483649" r:id="R87a8c246bb79455b"/>
+    <p:sldLayoutId xmlns:r="http://schemas.openxmlformats.org/officeDocument/2006/relationships" id="2147483649" r:id="R7f306deee26245fe"/>
   </p:sldLayoutIdLst>
   <p:txStyles>
     <p:titleStyle>
@@ -1842,7 +1842,7 @@
           <p:cNvPr id="12" name="">
             <a:extLst xmlns:a="http://schemas.openxmlformats.org/drawingml/2006/main">
               <a:ext uri="{FF2B5EF4-FFF2-40B4-BE49-F238E27FC236}">
-                <a16:creationId xmlns:a16="http://schemas.microsoft.com/office/drawing/2014/main" id="{0544B2C2-8B9B-4E3C-AEDF-DEAE1ECE5428}"/>
+                <a16:creationId xmlns:a16="http://schemas.microsoft.com/office/drawing/2014/main" id="{456EF0A0-53A0-4F4A-86F7-235AD789C520}"/>
               </a:ext>
             </a:extLst>
           </p:cNvPr>
@@ -1874,7 +1874,7 @@
           <p:cNvPr id="2" name="">
             <a:extLst xmlns:a="http://schemas.openxmlformats.org/drawingml/2006/main">
               <a:ext uri="{FF2B5EF4-FFF2-40B4-BE49-F238E27FC236}">
-                <a16:creationId xmlns:a16="http://schemas.microsoft.com/office/drawing/2014/main" id="{D6749F45-71E0-4400-91CF-E139396214CA}"/>
+                <a16:creationId xmlns:a16="http://schemas.microsoft.com/office/drawing/2014/main" id="{B1E1CA04-DB54-4379-99E1-C4CE2165B773}"/>
               </a:ext>
             </a:extLst>
           </p:cNvPr>
@@ -1931,7 +1931,7 @@
           <p:cNvPr id="3" name="">
             <a:extLst xmlns:a="http://schemas.openxmlformats.org/drawingml/2006/main">
               <a:ext uri="{FF2B5EF4-FFF2-40B4-BE49-F238E27FC236}">
-                <a16:creationId xmlns:a16="http://schemas.microsoft.com/office/drawing/2014/main" id="{0AE2D331-A3BC-4C4B-8C26-F3A7EF7E788E}"/>
+                <a16:creationId xmlns:a16="http://schemas.microsoft.com/office/drawing/2014/main" id="{0C0D41A3-12EF-4AE3-BC45-6596184675A0}"/>
               </a:ext>
             </a:extLst>
           </p:cNvPr>
@@ -1965,7 +1965,7 @@
           <p:cNvPr id="4" name="">
             <a:extLst xmlns:a="http://schemas.openxmlformats.org/drawingml/2006/main">
               <a:ext uri="{FF2B5EF4-FFF2-40B4-BE49-F238E27FC236}">
-                <a16:creationId xmlns:a16="http://schemas.microsoft.com/office/drawing/2014/main" id="{C1CBC6BF-D144-4FB9-A39A-A995399A6A89}"/>
+                <a16:creationId xmlns:a16="http://schemas.microsoft.com/office/drawing/2014/main" id="{01EA1360-DBD5-4235-BE71-4C0FBC6D3BAB}"/>
               </a:ext>
             </a:extLst>
           </p:cNvPr>
@@ -2022,7 +2022,7 @@
           <p:cNvPr id="5" name="">
             <a:extLst xmlns:a="http://schemas.openxmlformats.org/drawingml/2006/main">
               <a:ext uri="{FF2B5EF4-FFF2-40B4-BE49-F238E27FC236}">
-                <a16:creationId xmlns:a16="http://schemas.microsoft.com/office/drawing/2014/main" id="{1635F376-227D-4FC6-BB22-87C562FE21EB}"/>
+                <a16:creationId xmlns:a16="http://schemas.microsoft.com/office/drawing/2014/main" id="{987EDCDF-4BBC-4444-8B43-96FC2A125940}"/>
               </a:ext>
             </a:extLst>
           </p:cNvPr>
@@ -2079,7 +2079,7 @@
           <p:cNvPr id="6" name="">
             <a:extLst xmlns:a="http://schemas.openxmlformats.org/drawingml/2006/main">
               <a:ext uri="{FF2B5EF4-FFF2-40B4-BE49-F238E27FC236}">
-                <a16:creationId xmlns:a16="http://schemas.microsoft.com/office/drawing/2014/main" id="{96A3F379-BAC4-40A7-A666-D3AE5CBF4542}"/>
+                <a16:creationId xmlns:a16="http://schemas.microsoft.com/office/drawing/2014/main" id="{B1F1C5AE-7180-4B03-981C-E975A45B73C2}"/>
               </a:ext>
             </a:extLst>
           </p:cNvPr>
@@ -2113,7 +2113,7 @@
           <p:cNvPr id="7" name="">
             <a:extLst xmlns:a="http://schemas.openxmlformats.org/drawingml/2006/main">
               <a:ext uri="{FF2B5EF4-FFF2-40B4-BE49-F238E27FC236}">
-                <a16:creationId xmlns:a16="http://schemas.microsoft.com/office/drawing/2014/main" id="{5F63D51E-DC83-4230-B312-F1495C8377DE}"/>
+                <a16:creationId xmlns:a16="http://schemas.microsoft.com/office/drawing/2014/main" id="{154F14E7-C9AE-4E03-9F14-D41FC912A9F1}"/>
               </a:ext>
             </a:extLst>
           </p:cNvPr>
@@ -2170,7 +2170,7 @@
           <p:cNvPr id="8" name="">
             <a:extLst xmlns:a="http://schemas.openxmlformats.org/drawingml/2006/main">
               <a:ext uri="{FF2B5EF4-FFF2-40B4-BE49-F238E27FC236}">
-                <a16:creationId xmlns:a16="http://schemas.microsoft.com/office/drawing/2014/main" id="{7E782421-EDFB-4366-ACF9-D73618697BEF}"/>
+                <a16:creationId xmlns:a16="http://schemas.microsoft.com/office/drawing/2014/main" id="{23AA9F09-8FE1-43EE-9005-BC8337537146}"/>
               </a:ext>
             </a:extLst>
           </p:cNvPr>
@@ -2227,7 +2227,7 @@
           <p:cNvPr id="9" name="">
             <a:extLst xmlns:a="http://schemas.openxmlformats.org/drawingml/2006/main">
               <a:ext uri="{FF2B5EF4-FFF2-40B4-BE49-F238E27FC236}">
-                <a16:creationId xmlns:a16="http://schemas.microsoft.com/office/drawing/2014/main" id="{CA2A9E4A-8CCB-4F53-BB59-605FD6BF70B5}"/>
+                <a16:creationId xmlns:a16="http://schemas.microsoft.com/office/drawing/2014/main" id="{AEB8F93E-6AF9-469C-84F7-C3801A6CAD94}"/>
               </a:ext>
             </a:extLst>
           </p:cNvPr>
@@ -2284,7 +2284,7 @@
           <p:cNvPr id="10" name="">
             <a:extLst xmlns:a="http://schemas.openxmlformats.org/drawingml/2006/main">
               <a:ext uri="{FF2B5EF4-FFF2-40B4-BE49-F238E27FC236}">
-                <a16:creationId xmlns:a16="http://schemas.microsoft.com/office/drawing/2014/main" id="{CF3A40A0-727C-4FE0-AB33-6177DE016682}"/>
+                <a16:creationId xmlns:a16="http://schemas.microsoft.com/office/drawing/2014/main" id="{69CE7DFE-94AD-47E1-8D09-FC48B5B13E6E}"/>
               </a:ext>
             </a:extLst>
           </p:cNvPr>
@@ -2341,7 +2341,7 @@
           <p:cNvPr id="11" name="">
             <a:extLst xmlns:a="http://schemas.openxmlformats.org/drawingml/2006/main">
               <a:ext uri="{FF2B5EF4-FFF2-40B4-BE49-F238E27FC236}">
-                <a16:creationId xmlns:a16="http://schemas.microsoft.com/office/drawing/2014/main" id="{A419560A-A133-4891-9505-9D60A11C192A}"/>
+                <a16:creationId xmlns:a16="http://schemas.microsoft.com/office/drawing/2014/main" id="{EC177E34-4529-4248-9100-B7F944B8FB95}"/>
               </a:ext>
             </a:extLst>
           </p:cNvPr>
@@ -2396,7 +2396,7 @@
     </p:spTree>
     <p:extLst>
       <p:ext uri="{BB962C8B-B14F-4D97-AF65-F5344CB8AC3E}">
-        <p14:creationId xmlns:p14="http://schemas.microsoft.com/office/powerpoint/2010/main" val="229953024"/>
+        <p14:creationId xmlns:p14="http://schemas.microsoft.com/office/powerpoint/2010/main" val="1714978738"/>
       </p:ext>
     </p:extLst>
   </p:cSld>
@@ -2427,7 +2427,7 @@
           <p:cNvPr id="14" name="">
             <a:extLst xmlns:a="http://schemas.openxmlformats.org/drawingml/2006/main">
               <a:ext uri="{FF2B5EF4-FFF2-40B4-BE49-F238E27FC236}">
-                <a16:creationId xmlns:a16="http://schemas.microsoft.com/office/drawing/2014/main" id="{BF527D0E-4AA5-4ECA-9F4F-333F35F20CAC}"/>
+                <a16:creationId xmlns:a16="http://schemas.microsoft.com/office/drawing/2014/main" id="{08E69CE4-792C-4CFA-A383-BB35B3F1FBC0}"/>
               </a:ext>
             </a:extLst>
           </p:cNvPr>
@@ -2459,7 +2459,7 @@
           <p:cNvPr id="2" name="">
             <a:extLst xmlns:a="http://schemas.openxmlformats.org/drawingml/2006/main">
               <a:ext uri="{FF2B5EF4-FFF2-40B4-BE49-F238E27FC236}">
-                <a16:creationId xmlns:a16="http://schemas.microsoft.com/office/drawing/2014/main" id="{E1DC35B3-6C80-4DCB-8FC6-394E0CDD7277}"/>
+                <a16:creationId xmlns:a16="http://schemas.microsoft.com/office/drawing/2014/main" id="{2A4B71E3-8CB7-43AE-95C3-0928F851AD21}"/>
               </a:ext>
             </a:extLst>
           </p:cNvPr>
@@ -2516,7 +2516,7 @@
           <p:cNvPr id="3" name="">
             <a:extLst xmlns:a="http://schemas.openxmlformats.org/drawingml/2006/main">
               <a:ext uri="{FF2B5EF4-FFF2-40B4-BE49-F238E27FC236}">
-                <a16:creationId xmlns:a16="http://schemas.microsoft.com/office/drawing/2014/main" id="{94CE74E8-9681-49D9-9E95-F8E770AC1BD3}"/>
+                <a16:creationId xmlns:a16="http://schemas.microsoft.com/office/drawing/2014/main" id="{D544027E-049E-4A58-8817-4F7A6F54E023}"/>
               </a:ext>
             </a:extLst>
           </p:cNvPr>
@@ -2548,7 +2548,7 @@
           <p:cNvPr id="4" name="">
             <a:extLst xmlns:a="http://schemas.openxmlformats.org/drawingml/2006/main">
               <a:ext uri="{FF2B5EF4-FFF2-40B4-BE49-F238E27FC236}">
-                <a16:creationId xmlns:a16="http://schemas.microsoft.com/office/drawing/2014/main" id="{8360453A-97D9-40E8-A627-17FA8C77038C}"/>
+                <a16:creationId xmlns:a16="http://schemas.microsoft.com/office/drawing/2014/main" id="{9BFC1331-EBA6-4541-9888-9CB215DD5849}"/>
               </a:ext>
             </a:extLst>
           </p:cNvPr>
@@ -2605,7 +2605,7 @@
           <p:cNvPr id="5" name="">
             <a:extLst xmlns:a="http://schemas.openxmlformats.org/drawingml/2006/main">
               <a:ext uri="{FF2B5EF4-FFF2-40B4-BE49-F238E27FC236}">
-                <a16:creationId xmlns:a16="http://schemas.microsoft.com/office/drawing/2014/main" id="{92CBD29A-23A4-4CB0-A4C1-797E1369D888}"/>
+                <a16:creationId xmlns:a16="http://schemas.microsoft.com/office/drawing/2014/main" id="{F5617FC9-7FBF-44B7-84B6-9CA786DF0FAE}"/>
               </a:ext>
             </a:extLst>
           </p:cNvPr>
@@ -2662,7 +2662,7 @@
           <p:cNvPr id="6" name="">
             <a:extLst xmlns:a="http://schemas.openxmlformats.org/drawingml/2006/main">
               <a:ext uri="{FF2B5EF4-FFF2-40B4-BE49-F238E27FC236}">
-                <a16:creationId xmlns:a16="http://schemas.microsoft.com/office/drawing/2014/main" id="{8094C517-1E32-4963-B3FE-AD39E6489415}"/>
+                <a16:creationId xmlns:a16="http://schemas.microsoft.com/office/drawing/2014/main" id="{0DC5E9B9-0A91-40A9-82C6-5193EA27982B}"/>
               </a:ext>
             </a:extLst>
           </p:cNvPr>
@@ -2719,7 +2719,7 @@
           <p:cNvPr id="7" name="">
             <a:extLst xmlns:a="http://schemas.openxmlformats.org/drawingml/2006/main">
               <a:ext uri="{FF2B5EF4-FFF2-40B4-BE49-F238E27FC236}">
-                <a16:creationId xmlns:a16="http://schemas.microsoft.com/office/drawing/2014/main" id="{C03C445E-2486-4ED2-9C6B-0B0C590FA629}"/>
+                <a16:creationId xmlns:a16="http://schemas.microsoft.com/office/drawing/2014/main" id="{BAE9D65C-D095-4DB0-A7A7-D714B6DA0BEE}"/>
               </a:ext>
             </a:extLst>
           </p:cNvPr>
@@ -2751,7 +2751,7 @@
           <p:cNvPr id="8" name="">
             <a:extLst xmlns:a="http://schemas.openxmlformats.org/drawingml/2006/main">
               <a:ext uri="{FF2B5EF4-FFF2-40B4-BE49-F238E27FC236}">
-                <a16:creationId xmlns:a16="http://schemas.microsoft.com/office/drawing/2014/main" id="{82D7EECF-8B1F-447B-9B21-2425A8AB0268}"/>
+                <a16:creationId xmlns:a16="http://schemas.microsoft.com/office/drawing/2014/main" id="{71C4739B-A2D7-4BA9-9C9E-38A3EC8F9525}"/>
               </a:ext>
             </a:extLst>
           </p:cNvPr>
@@ -2808,7 +2808,7 @@
           <p:cNvPr id="9" name="">
             <a:extLst xmlns:a="http://schemas.openxmlformats.org/drawingml/2006/main">
               <a:ext uri="{FF2B5EF4-FFF2-40B4-BE49-F238E27FC236}">
-                <a16:creationId xmlns:a16="http://schemas.microsoft.com/office/drawing/2014/main" id="{52B82A60-C66B-4DD9-AE11-71AC7C75CD5C}"/>
+                <a16:creationId xmlns:a16="http://schemas.microsoft.com/office/drawing/2014/main" id="{313FC974-C8DF-49A4-A334-05E3446F11A9}"/>
               </a:ext>
             </a:extLst>
           </p:cNvPr>
@@ -2865,7 +2865,7 @@
           <p:cNvPr id="10" name="">
             <a:extLst xmlns:a="http://schemas.openxmlformats.org/drawingml/2006/main">
               <a:ext uri="{FF2B5EF4-FFF2-40B4-BE49-F238E27FC236}">
-                <a16:creationId xmlns:a16="http://schemas.microsoft.com/office/drawing/2014/main" id="{5D74165C-43EE-4F3F-BB1A-2163BB7B882E}"/>
+                <a16:creationId xmlns:a16="http://schemas.microsoft.com/office/drawing/2014/main" id="{F5B75B4E-A114-468B-B6F8-93BD9EF82591}"/>
               </a:ext>
             </a:extLst>
           </p:cNvPr>
@@ -2922,7 +2922,7 @@
           <p:cNvPr id="11" name="">
             <a:extLst xmlns:a="http://schemas.openxmlformats.org/drawingml/2006/main">
               <a:ext uri="{FF2B5EF4-FFF2-40B4-BE49-F238E27FC236}">
-                <a16:creationId xmlns:a16="http://schemas.microsoft.com/office/drawing/2014/main" id="{B1B54B92-8E58-4FA9-9D88-A2D2C04E95A2}"/>
+                <a16:creationId xmlns:a16="http://schemas.microsoft.com/office/drawing/2014/main" id="{371825E3-5753-477E-952E-19C8E6D24CB6}"/>
               </a:ext>
             </a:extLst>
           </p:cNvPr>
@@ -2979,7 +2979,7 @@
           <p:cNvPr id="12" name="">
             <a:extLst xmlns:a="http://schemas.openxmlformats.org/drawingml/2006/main">
               <a:ext uri="{FF2B5EF4-FFF2-40B4-BE49-F238E27FC236}">
-                <a16:creationId xmlns:a16="http://schemas.microsoft.com/office/drawing/2014/main" id="{1192C1DA-58C6-4EF8-A86E-72075FFD2004}"/>
+                <a16:creationId xmlns:a16="http://schemas.microsoft.com/office/drawing/2014/main" id="{732C63D8-1929-4D76-995D-38FB4682DBD8}"/>
               </a:ext>
             </a:extLst>
           </p:cNvPr>
@@ -3036,7 +3036,7 @@
           <p:cNvPr id="13" name="">
             <a:extLst xmlns:a="http://schemas.openxmlformats.org/drawingml/2006/main">
               <a:ext uri="{FF2B5EF4-FFF2-40B4-BE49-F238E27FC236}">
-                <a16:creationId xmlns:a16="http://schemas.microsoft.com/office/drawing/2014/main" id="{23E11352-E32B-49B5-9C8F-1A19AB3A9549}"/>
+                <a16:creationId xmlns:a16="http://schemas.microsoft.com/office/drawing/2014/main" id="{9088DF15-E07E-45E9-B3B7-7F6374A27B20}"/>
               </a:ext>
             </a:extLst>
           </p:cNvPr>
@@ -3091,7 +3091,7 @@
     </p:spTree>
     <p:extLst>
       <p:ext uri="{BB962C8B-B14F-4D97-AF65-F5344CB8AC3E}">
-        <p14:creationId xmlns:p14="http://schemas.microsoft.com/office/powerpoint/2010/main" val="2046476031"/>
+        <p14:creationId xmlns:p14="http://schemas.microsoft.com/office/powerpoint/2010/main" val="745962439"/>
       </p:ext>
     </p:extLst>
   </p:cSld>
@@ -3292,7 +3292,7 @@
           <p:cNvPr id="19" name="">
             <a:extLst xmlns:a="http://schemas.openxmlformats.org/drawingml/2006/main">
               <a:ext uri="{FF2B5EF4-FFF2-40B4-BE49-F238E27FC236}">
-                <a16:creationId xmlns:a16="http://schemas.microsoft.com/office/drawing/2014/main" id="{99086D3F-77F0-4C62-943C-1CED14CF434C}"/>
+                <a16:creationId xmlns:a16="http://schemas.microsoft.com/office/drawing/2014/main" id="{AAA90A95-6CE4-49CF-B61F-6DEC3CDB5E69}"/>
               </a:ext>
             </a:extLst>
           </p:cNvPr>
@@ -3324,7 +3324,7 @@
           <p:cNvPr id="2" name="">
             <a:extLst xmlns:a="http://schemas.openxmlformats.org/drawingml/2006/main">
               <a:ext uri="{FF2B5EF4-FFF2-40B4-BE49-F238E27FC236}">
-                <a16:creationId xmlns:a16="http://schemas.microsoft.com/office/drawing/2014/main" id="{776E5AFE-ABA4-4039-9187-7441DC110209}"/>
+                <a16:creationId xmlns:a16="http://schemas.microsoft.com/office/drawing/2014/main" id="{E8503A75-4021-4BB6-9108-D512F4B9590E}"/>
               </a:ext>
             </a:extLst>
           </p:cNvPr>
@@ -3381,7 +3381,7 @@
           <p:cNvPr id="3" name="">
             <a:extLst xmlns:a="http://schemas.openxmlformats.org/drawingml/2006/main">
               <a:ext uri="{FF2B5EF4-FFF2-40B4-BE49-F238E27FC236}">
-                <a16:creationId xmlns:a16="http://schemas.microsoft.com/office/drawing/2014/main" id="{BCB89F66-FDC0-4F4E-B7C2-9AE7350779D4}"/>
+                <a16:creationId xmlns:a16="http://schemas.microsoft.com/office/drawing/2014/main" id="{C1AE16F1-AD3B-4B83-82EE-7DE95B857780}"/>
               </a:ext>
             </a:extLst>
           </p:cNvPr>
@@ -3413,7 +3413,7 @@
           <p:cNvPr id="4" name="">
             <a:extLst xmlns:a="http://schemas.openxmlformats.org/drawingml/2006/main">
               <a:ext uri="{FF2B5EF4-FFF2-40B4-BE49-F238E27FC236}">
-                <a16:creationId xmlns:a16="http://schemas.microsoft.com/office/drawing/2014/main" id="{AE7524E6-B025-41A9-AE8D-461D8051F34A}"/>
+                <a16:creationId xmlns:a16="http://schemas.microsoft.com/office/drawing/2014/main" id="{6FF78985-A839-4225-B631-1A984FE389B6}"/>
               </a:ext>
             </a:extLst>
           </p:cNvPr>
@@ -3470,7 +3470,7 @@
           <p:cNvPr id="5" name="">
             <a:extLst xmlns:a="http://schemas.openxmlformats.org/drawingml/2006/main">
               <a:ext uri="{FF2B5EF4-FFF2-40B4-BE49-F238E27FC236}">
-                <a16:creationId xmlns:a16="http://schemas.microsoft.com/office/drawing/2014/main" id="{143C2F71-0D8E-427A-9DA7-E7C15206B670}"/>
+                <a16:creationId xmlns:a16="http://schemas.microsoft.com/office/drawing/2014/main" id="{2307E9F2-A850-4F8F-BCFB-9786CE219436}"/>
               </a:ext>
             </a:extLst>
           </p:cNvPr>
@@ -3527,7 +3527,7 @@
           <p:cNvPr id="6" name="">
             <a:extLst xmlns:a="http://schemas.openxmlformats.org/drawingml/2006/main">
               <a:ext uri="{FF2B5EF4-FFF2-40B4-BE49-F238E27FC236}">
-                <a16:creationId xmlns:a16="http://schemas.microsoft.com/office/drawing/2014/main" id="{6B494867-832A-42C6-A91A-20BBB02A6A44}"/>
+                <a16:creationId xmlns:a16="http://schemas.microsoft.com/office/drawing/2014/main" id="{84C42840-971E-406B-87D1-91DACFC91C06}"/>
               </a:ext>
             </a:extLst>
           </p:cNvPr>
@@ -3584,7 +3584,7 @@
           <p:cNvPr id="7" name="">
             <a:extLst xmlns:a="http://schemas.openxmlformats.org/drawingml/2006/main">
               <a:ext uri="{FF2B5EF4-FFF2-40B4-BE49-F238E27FC236}">
-                <a16:creationId xmlns:a16="http://schemas.microsoft.com/office/drawing/2014/main" id="{A188011B-B5FD-41CA-BE9E-932126EF70CE}"/>
+                <a16:creationId xmlns:a16="http://schemas.microsoft.com/office/drawing/2014/main" id="{6289FEF9-65D4-4DEC-92E6-9B3BEBA610E3}"/>
               </a:ext>
             </a:extLst>
           </p:cNvPr>
@@ -3616,7 +3616,7 @@
           <p:cNvPr id="8" name="">
             <a:extLst xmlns:a="http://schemas.openxmlformats.org/drawingml/2006/main">
               <a:ext uri="{FF2B5EF4-FFF2-40B4-BE49-F238E27FC236}">
-                <a16:creationId xmlns:a16="http://schemas.microsoft.com/office/drawing/2014/main" id="{B71AD36B-CB37-4A5D-BD46-1F30DB94FFBC}"/>
+                <a16:creationId xmlns:a16="http://schemas.microsoft.com/office/drawing/2014/main" id="{33417D2B-B513-447F-8A0D-B2B5282BBDCB}"/>
               </a:ext>
             </a:extLst>
           </p:cNvPr>
@@ -3673,7 +3673,7 @@
           <p:cNvPr id="9" name="">
             <a:extLst xmlns:a="http://schemas.openxmlformats.org/drawingml/2006/main">
               <a:ext uri="{FF2B5EF4-FFF2-40B4-BE49-F238E27FC236}">
-                <a16:creationId xmlns:a16="http://schemas.microsoft.com/office/drawing/2014/main" id="{89EB4C07-AD5D-4A32-9F6D-9FF53342DBBC}"/>
+                <a16:creationId xmlns:a16="http://schemas.microsoft.com/office/drawing/2014/main" id="{17E31742-D3F9-47C8-8FDC-47FBAD58ABD6}"/>
               </a:ext>
             </a:extLst>
           </p:cNvPr>
@@ -3730,7 +3730,7 @@
           <p:cNvPr id="10" name="">
             <a:extLst xmlns:a="http://schemas.openxmlformats.org/drawingml/2006/main">
               <a:ext uri="{FF2B5EF4-FFF2-40B4-BE49-F238E27FC236}">
-                <a16:creationId xmlns:a16="http://schemas.microsoft.com/office/drawing/2014/main" id="{085A0B12-ED55-4FB0-9F8C-50BB25AFCE82}"/>
+                <a16:creationId xmlns:a16="http://schemas.microsoft.com/office/drawing/2014/main" id="{C1B729DA-80AA-46FC-8D7F-41B99C94A592}"/>
               </a:ext>
             </a:extLst>
           </p:cNvPr>
@@ -3787,7 +3787,7 @@
           <p:cNvPr id="11" name="">
             <a:extLst xmlns:a="http://schemas.openxmlformats.org/drawingml/2006/main">
               <a:ext uri="{FF2B5EF4-FFF2-40B4-BE49-F238E27FC236}">
-                <a16:creationId xmlns:a16="http://schemas.microsoft.com/office/drawing/2014/main" id="{69FEAE43-FC99-4E50-8C13-3FFBEE8735A9}"/>
+                <a16:creationId xmlns:a16="http://schemas.microsoft.com/office/drawing/2014/main" id="{6A3117B3-C18F-4B48-BEEC-A4370907E893}"/>
               </a:ext>
             </a:extLst>
           </p:cNvPr>
@@ -3821,7 +3821,7 @@
           <p:cNvPr id="12" name="">
             <a:extLst xmlns:a="http://schemas.openxmlformats.org/drawingml/2006/main">
               <a:ext uri="{FF2B5EF4-FFF2-40B4-BE49-F238E27FC236}">
-                <a16:creationId xmlns:a16="http://schemas.microsoft.com/office/drawing/2014/main" id="{5D024798-FA74-4381-BA59-B7AAE250C077}"/>
+                <a16:creationId xmlns:a16="http://schemas.microsoft.com/office/drawing/2014/main" id="{6CACAB45-873D-459E-80BC-A3B8FCABA5E8}"/>
               </a:ext>
             </a:extLst>
           </p:cNvPr>
@@ -3878,7 +3878,7 @@
           <p:cNvPr id="13" name="">
             <a:extLst xmlns:a="http://schemas.openxmlformats.org/drawingml/2006/main">
               <a:ext uri="{FF2B5EF4-FFF2-40B4-BE49-F238E27FC236}">
-                <a16:creationId xmlns:a16="http://schemas.microsoft.com/office/drawing/2014/main" id="{B20A99A7-0406-40BC-B53F-5E055AA930D7}"/>
+                <a16:creationId xmlns:a16="http://schemas.microsoft.com/office/drawing/2014/main" id="{DC080C5F-A2FC-40B8-B215-BB278B69E016}"/>
               </a:ext>
             </a:extLst>
           </p:cNvPr>
@@ -3935,7 +3935,7 @@
           <p:cNvPr id="14" name="">
             <a:extLst xmlns:a="http://schemas.openxmlformats.org/drawingml/2006/main">
               <a:ext uri="{FF2B5EF4-FFF2-40B4-BE49-F238E27FC236}">
-                <a16:creationId xmlns:a16="http://schemas.microsoft.com/office/drawing/2014/main" id="{69D37663-C7F5-429D-BC18-5D964C3E8675}"/>
+                <a16:creationId xmlns:a16="http://schemas.microsoft.com/office/drawing/2014/main" id="{ACB80F90-8A9C-4213-8CA4-0368A4EEF6FC}"/>
               </a:ext>
             </a:extLst>
           </p:cNvPr>
@@ -3992,7 +3992,7 @@
           <p:cNvPr id="15" name="">
             <a:extLst xmlns:a="http://schemas.openxmlformats.org/drawingml/2006/main">
               <a:ext uri="{FF2B5EF4-FFF2-40B4-BE49-F238E27FC236}">
-                <a16:creationId xmlns:a16="http://schemas.microsoft.com/office/drawing/2014/main" id="{6C35F633-0FBF-4712-8618-0734A7AEEC08}"/>
+                <a16:creationId xmlns:a16="http://schemas.microsoft.com/office/drawing/2014/main" id="{63D5E9C5-C6C8-4FA1-8DA2-12C2304B8DFA}"/>
               </a:ext>
             </a:extLst>
           </p:cNvPr>
@@ -4026,7 +4026,7 @@
           <p:cNvPr id="16" name="">
             <a:extLst xmlns:a="http://schemas.openxmlformats.org/drawingml/2006/main">
               <a:ext uri="{FF2B5EF4-FFF2-40B4-BE49-F238E27FC236}">
-                <a16:creationId xmlns:a16="http://schemas.microsoft.com/office/drawing/2014/main" id="{7855AC51-DB3F-4194-B008-58A4D3FCE50D}"/>
+                <a16:creationId xmlns:a16="http://schemas.microsoft.com/office/drawing/2014/main" id="{2C3A6E2E-A90C-428B-B5AD-A5D9F7EAC7C3}"/>
               </a:ext>
             </a:extLst>
           </p:cNvPr>
@@ -4083,7 +4083,7 @@
           <p:cNvPr id="17" name="">
             <a:extLst xmlns:a="http://schemas.openxmlformats.org/drawingml/2006/main">
               <a:ext uri="{FF2B5EF4-FFF2-40B4-BE49-F238E27FC236}">
-                <a16:creationId xmlns:a16="http://schemas.microsoft.com/office/drawing/2014/main" id="{0959A464-FF4B-41FC-BAFA-1F136D622B1C}"/>
+                <a16:creationId xmlns:a16="http://schemas.microsoft.com/office/drawing/2014/main" id="{CE938661-0C73-44AE-A852-5A4543F10FC6}"/>
               </a:ext>
             </a:extLst>
           </p:cNvPr>
@@ -4140,7 +4140,7 @@
           <p:cNvPr id="18" name="">
             <a:extLst xmlns:a="http://schemas.openxmlformats.org/drawingml/2006/main">
               <a:ext uri="{FF2B5EF4-FFF2-40B4-BE49-F238E27FC236}">
-                <a16:creationId xmlns:a16="http://schemas.microsoft.com/office/drawing/2014/main" id="{81EAAF19-93E0-43D1-8822-61C24973B581}"/>
+                <a16:creationId xmlns:a16="http://schemas.microsoft.com/office/drawing/2014/main" id="{F3F22879-2BA6-466E-93C4-1B94D50E16BE}"/>
               </a:ext>
             </a:extLst>
           </p:cNvPr>
@@ -4195,7 +4195,7 @@
     </p:spTree>
     <p:extLst>
       <p:ext uri="{BB962C8B-B14F-4D97-AF65-F5344CB8AC3E}">
-        <p14:creationId xmlns:p14="http://schemas.microsoft.com/office/powerpoint/2010/main" val="1181343224"/>
+        <p14:creationId xmlns:p14="http://schemas.microsoft.com/office/powerpoint/2010/main" val="1637319473"/>
       </p:ext>
     </p:extLst>
   </p:cSld>
@@ -4350,7 +4350,7 @@
           <p:cNvPr id="23" name="">
             <a:extLst xmlns:a="http://schemas.openxmlformats.org/drawingml/2006/main">
               <a:ext uri="{FF2B5EF4-FFF2-40B4-BE49-F238E27FC236}">
-                <a16:creationId xmlns:a16="http://schemas.microsoft.com/office/drawing/2014/main" id="{932A3FC4-AB56-40AF-8B34-704EDD234909}"/>
+                <a16:creationId xmlns:a16="http://schemas.microsoft.com/office/drawing/2014/main" id="{114F25AF-CBB4-485D-98FA-7A26E018549D}"/>
               </a:ext>
             </a:extLst>
           </p:cNvPr>
@@ -4382,7 +4382,7 @@
           <p:cNvPr id="2" name="">
             <a:extLst xmlns:a="http://schemas.openxmlformats.org/drawingml/2006/main">
               <a:ext uri="{FF2B5EF4-FFF2-40B4-BE49-F238E27FC236}">
-                <a16:creationId xmlns:a16="http://schemas.microsoft.com/office/drawing/2014/main" id="{095429F4-A2EF-4AD3-A772-39C4B8F2EA74}"/>
+                <a16:creationId xmlns:a16="http://schemas.microsoft.com/office/drawing/2014/main" id="{7BDC31D3-C10A-426E-B434-AD371099ED66}"/>
               </a:ext>
             </a:extLst>
           </p:cNvPr>
@@ -4439,7 +4439,7 @@
           <p:cNvPr id="3" name="">
             <a:extLst xmlns:a="http://schemas.openxmlformats.org/drawingml/2006/main">
               <a:ext uri="{FF2B5EF4-FFF2-40B4-BE49-F238E27FC236}">
-                <a16:creationId xmlns:a16="http://schemas.microsoft.com/office/drawing/2014/main" id="{A0752E9F-2A08-4839-8DD2-DB746BE7BCF6}"/>
+                <a16:creationId xmlns:a16="http://schemas.microsoft.com/office/drawing/2014/main" id="{C5B3AEFC-E141-4691-B1CD-5EEEA21D2B06}"/>
               </a:ext>
             </a:extLst>
           </p:cNvPr>
@@ -4471,7 +4471,7 @@
           <p:cNvPr id="4" name="">
             <a:extLst xmlns:a="http://schemas.openxmlformats.org/drawingml/2006/main">
               <a:ext uri="{FF2B5EF4-FFF2-40B4-BE49-F238E27FC236}">
-                <a16:creationId xmlns:a16="http://schemas.microsoft.com/office/drawing/2014/main" id="{4CD562F6-CC58-415D-AA68-C4341F35FF9D}"/>
+                <a16:creationId xmlns:a16="http://schemas.microsoft.com/office/drawing/2014/main" id="{713A402B-7A4D-4E93-ABF6-B791306E5C81}"/>
               </a:ext>
             </a:extLst>
           </p:cNvPr>
@@ -4528,7 +4528,7 @@
           <p:cNvPr id="5" name="">
             <a:extLst xmlns:a="http://schemas.openxmlformats.org/drawingml/2006/main">
               <a:ext uri="{FF2B5EF4-FFF2-40B4-BE49-F238E27FC236}">
-                <a16:creationId xmlns:a16="http://schemas.microsoft.com/office/drawing/2014/main" id="{F28EED33-4528-467A-800B-FA2AFC185655}"/>
+                <a16:creationId xmlns:a16="http://schemas.microsoft.com/office/drawing/2014/main" id="{BDF0B7DA-773D-40C4-BE7B-CCF392F1B87B}"/>
               </a:ext>
             </a:extLst>
           </p:cNvPr>
@@ -4585,7 +4585,7 @@
           <p:cNvPr id="6" name="">
             <a:extLst xmlns:a="http://schemas.openxmlformats.org/drawingml/2006/main">
               <a:ext uri="{FF2B5EF4-FFF2-40B4-BE49-F238E27FC236}">
-                <a16:creationId xmlns:a16="http://schemas.microsoft.com/office/drawing/2014/main" id="{C17C9A28-C0E6-490E-BD90-800C0C7F6DE5}"/>
+                <a16:creationId xmlns:a16="http://schemas.microsoft.com/office/drawing/2014/main" id="{C631A402-8658-453E-939A-832332360D09}"/>
               </a:ext>
             </a:extLst>
           </p:cNvPr>
@@ -4642,7 +4642,7 @@
           <p:cNvPr id="7" name="">
             <a:extLst xmlns:a="http://schemas.openxmlformats.org/drawingml/2006/main">
               <a:ext uri="{FF2B5EF4-FFF2-40B4-BE49-F238E27FC236}">
-                <a16:creationId xmlns:a16="http://schemas.microsoft.com/office/drawing/2014/main" id="{C0D9095A-69F5-4BFB-93F9-EF2D0A4909E8}"/>
+                <a16:creationId xmlns:a16="http://schemas.microsoft.com/office/drawing/2014/main" id="{64E84A4D-8556-4236-AD36-25FE8F176140}"/>
               </a:ext>
             </a:extLst>
           </p:cNvPr>
@@ -4674,7 +4674,7 @@
           <p:cNvPr id="8" name="">
             <a:extLst xmlns:a="http://schemas.openxmlformats.org/drawingml/2006/main">
               <a:ext uri="{FF2B5EF4-FFF2-40B4-BE49-F238E27FC236}">
-                <a16:creationId xmlns:a16="http://schemas.microsoft.com/office/drawing/2014/main" id="{D2E0A2CB-5EAA-4FDD-9AD1-15B766FA3260}"/>
+                <a16:creationId xmlns:a16="http://schemas.microsoft.com/office/drawing/2014/main" id="{186406F6-3A52-46A5-B4E9-92957BF0D31A}"/>
               </a:ext>
             </a:extLst>
           </p:cNvPr>
@@ -4731,7 +4731,7 @@
           <p:cNvPr id="9" name="">
             <a:extLst xmlns:a="http://schemas.openxmlformats.org/drawingml/2006/main">
               <a:ext uri="{FF2B5EF4-FFF2-40B4-BE49-F238E27FC236}">
-                <a16:creationId xmlns:a16="http://schemas.microsoft.com/office/drawing/2014/main" id="{D9DF3B93-3A33-450F-B364-52FF05D79846}"/>
+                <a16:creationId xmlns:a16="http://schemas.microsoft.com/office/drawing/2014/main" id="{57C56345-E5B1-4FC8-920A-D0B6A9D87E9C}"/>
               </a:ext>
             </a:extLst>
           </p:cNvPr>
@@ -4788,7 +4788,7 @@
           <p:cNvPr id="10" name="">
             <a:extLst xmlns:a="http://schemas.openxmlformats.org/drawingml/2006/main">
               <a:ext uri="{FF2B5EF4-FFF2-40B4-BE49-F238E27FC236}">
-                <a16:creationId xmlns:a16="http://schemas.microsoft.com/office/drawing/2014/main" id="{43E92BCD-4EEB-441D-A98B-A28F6BD1AD3F}"/>
+                <a16:creationId xmlns:a16="http://schemas.microsoft.com/office/drawing/2014/main" id="{FA15E51D-392A-4A45-BD88-18C5BA6D18E4}"/>
               </a:ext>
             </a:extLst>
           </p:cNvPr>
@@ -4822,7 +4822,7 @@
           <p:cNvPr id="11" name="">
             <a:extLst xmlns:a="http://schemas.openxmlformats.org/drawingml/2006/main">
               <a:ext uri="{FF2B5EF4-FFF2-40B4-BE49-F238E27FC236}">
-                <a16:creationId xmlns:a16="http://schemas.microsoft.com/office/drawing/2014/main" id="{CF62D3FC-48BD-4655-988C-0FC622D9A701}"/>
+                <a16:creationId xmlns:a16="http://schemas.microsoft.com/office/drawing/2014/main" id="{50988325-0FF1-42A2-B464-2230C251332C}"/>
               </a:ext>
             </a:extLst>
           </p:cNvPr>
@@ -4854,7 +4854,7 @@
           <p:cNvPr id="12" name="">
             <a:extLst xmlns:a="http://schemas.openxmlformats.org/drawingml/2006/main">
               <a:ext uri="{FF2B5EF4-FFF2-40B4-BE49-F238E27FC236}">
-                <a16:creationId xmlns:a16="http://schemas.microsoft.com/office/drawing/2014/main" id="{298C38EA-8EE8-4CC3-B0B0-724EF8642D10}"/>
+                <a16:creationId xmlns:a16="http://schemas.microsoft.com/office/drawing/2014/main" id="{38108260-A2AE-40F8-8D50-890171FD86A2}"/>
               </a:ext>
             </a:extLst>
           </p:cNvPr>
@@ -4911,7 +4911,7 @@
           <p:cNvPr id="13" name="">
             <a:extLst xmlns:a="http://schemas.openxmlformats.org/drawingml/2006/main">
               <a:ext uri="{FF2B5EF4-FFF2-40B4-BE49-F238E27FC236}">
-                <a16:creationId xmlns:a16="http://schemas.microsoft.com/office/drawing/2014/main" id="{B26701B0-5283-41EE-B9F8-E368D102AAB4}"/>
+                <a16:creationId xmlns:a16="http://schemas.microsoft.com/office/drawing/2014/main" id="{4619F632-C280-40D2-A13A-736F95F50148}"/>
               </a:ext>
             </a:extLst>
           </p:cNvPr>
@@ -4968,7 +4968,7 @@
           <p:cNvPr id="14" name="">
             <a:extLst xmlns:a="http://schemas.openxmlformats.org/drawingml/2006/main">
               <a:ext uri="{FF2B5EF4-FFF2-40B4-BE49-F238E27FC236}">
-                <a16:creationId xmlns:a16="http://schemas.microsoft.com/office/drawing/2014/main" id="{1CDBF4E6-92F9-48ED-BD81-250EF5BAD1B5}"/>
+                <a16:creationId xmlns:a16="http://schemas.microsoft.com/office/drawing/2014/main" id="{C2ABF7F0-28CF-44C0-A28B-B3F138010A0D}"/>
               </a:ext>
             </a:extLst>
           </p:cNvPr>
@@ -5002,7 +5002,7 @@
           <p:cNvPr id="15" name="">
             <a:extLst xmlns:a="http://schemas.openxmlformats.org/drawingml/2006/main">
               <a:ext uri="{FF2B5EF4-FFF2-40B4-BE49-F238E27FC236}">
-                <a16:creationId xmlns:a16="http://schemas.microsoft.com/office/drawing/2014/main" id="{4CEB40CE-536D-4CFD-A945-F62B0429ED70}"/>
+                <a16:creationId xmlns:a16="http://schemas.microsoft.com/office/drawing/2014/main" id="{F3FA85BF-4167-47AE-BDB1-E11431EF303F}"/>
               </a:ext>
             </a:extLst>
           </p:cNvPr>
@@ -5034,7 +5034,7 @@
           <p:cNvPr id="16" name="">
             <a:extLst xmlns:a="http://schemas.openxmlformats.org/drawingml/2006/main">
               <a:ext uri="{FF2B5EF4-FFF2-40B4-BE49-F238E27FC236}">
-                <a16:creationId xmlns:a16="http://schemas.microsoft.com/office/drawing/2014/main" id="{A59FDBB4-1084-4B2D-9481-18A6510DB660}"/>
+                <a16:creationId xmlns:a16="http://schemas.microsoft.com/office/drawing/2014/main" id="{757C303F-DB75-456F-AC7D-7BE33757E654}"/>
               </a:ext>
             </a:extLst>
           </p:cNvPr>
@@ -5091,7 +5091,7 @@
           <p:cNvPr id="17" name="">
             <a:extLst xmlns:a="http://schemas.openxmlformats.org/drawingml/2006/main">
               <a:ext uri="{FF2B5EF4-FFF2-40B4-BE49-F238E27FC236}">
-                <a16:creationId xmlns:a16="http://schemas.microsoft.com/office/drawing/2014/main" id="{8AAB754A-5888-4520-9FBC-90DA1143A3D7}"/>
+                <a16:creationId xmlns:a16="http://schemas.microsoft.com/office/drawing/2014/main" id="{D355D604-1CA2-4867-B905-863CAD6F96A9}"/>
               </a:ext>
             </a:extLst>
           </p:cNvPr>
@@ -5148,7 +5148,7 @@
           <p:cNvPr id="18" name="">
             <a:extLst xmlns:a="http://schemas.openxmlformats.org/drawingml/2006/main">
               <a:ext uri="{FF2B5EF4-FFF2-40B4-BE49-F238E27FC236}">
-                <a16:creationId xmlns:a16="http://schemas.microsoft.com/office/drawing/2014/main" id="{71F08830-4E57-4921-AF9D-C5B44BF328DF}"/>
+                <a16:creationId xmlns:a16="http://schemas.microsoft.com/office/drawing/2014/main" id="{123B18C0-92B4-466A-96A0-B680C528C911}"/>
               </a:ext>
             </a:extLst>
           </p:cNvPr>
@@ -5182,7 +5182,7 @@
           <p:cNvPr id="19" name="">
             <a:extLst xmlns:a="http://schemas.openxmlformats.org/drawingml/2006/main">
               <a:ext uri="{FF2B5EF4-FFF2-40B4-BE49-F238E27FC236}">
-                <a16:creationId xmlns:a16="http://schemas.microsoft.com/office/drawing/2014/main" id="{CEC7E772-F6B6-4613-A846-17BE411F077E}"/>
+                <a16:creationId xmlns:a16="http://schemas.microsoft.com/office/drawing/2014/main" id="{D2257DDA-1EB2-4B13-82AE-6A347DBE3BF7}"/>
               </a:ext>
             </a:extLst>
           </p:cNvPr>
@@ -5214,7 +5214,7 @@
           <p:cNvPr id="20" name="">
             <a:extLst xmlns:a="http://schemas.openxmlformats.org/drawingml/2006/main">
               <a:ext uri="{FF2B5EF4-FFF2-40B4-BE49-F238E27FC236}">
-                <a16:creationId xmlns:a16="http://schemas.microsoft.com/office/drawing/2014/main" id="{F51588A6-13A4-4A55-9CF7-E3533E9EAF23}"/>
+                <a16:creationId xmlns:a16="http://schemas.microsoft.com/office/drawing/2014/main" id="{3DFA2447-0101-46FB-9B59-5B66102F6EF5}"/>
               </a:ext>
             </a:extLst>
           </p:cNvPr>
@@ -5271,7 +5271,7 @@
           <p:cNvPr id="21" name="">
             <a:extLst xmlns:a="http://schemas.openxmlformats.org/drawingml/2006/main">
               <a:ext uri="{FF2B5EF4-FFF2-40B4-BE49-F238E27FC236}">
-                <a16:creationId xmlns:a16="http://schemas.microsoft.com/office/drawing/2014/main" id="{D588F08A-3974-4F09-BEE8-8AC50C68FDA5}"/>
+                <a16:creationId xmlns:a16="http://schemas.microsoft.com/office/drawing/2014/main" id="{6E892E95-071C-4F6C-BA07-41BE93229D25}"/>
               </a:ext>
             </a:extLst>
           </p:cNvPr>
@@ -5328,7 +5328,7 @@
           <p:cNvPr id="22" name="">
             <a:extLst xmlns:a="http://schemas.openxmlformats.org/drawingml/2006/main">
               <a:ext uri="{FF2B5EF4-FFF2-40B4-BE49-F238E27FC236}">
-                <a16:creationId xmlns:a16="http://schemas.microsoft.com/office/drawing/2014/main" id="{CB8005CC-CB9F-44DE-B4E9-AF8F6542F004}"/>
+                <a16:creationId xmlns:a16="http://schemas.microsoft.com/office/drawing/2014/main" id="{CA94E7B8-30AC-48B9-9F61-D5F4E0910139}"/>
               </a:ext>
             </a:extLst>
           </p:cNvPr>
@@ -5383,7 +5383,7 @@
     </p:spTree>
     <p:extLst>
       <p:ext uri="{BB962C8B-B14F-4D97-AF65-F5344CB8AC3E}">
-        <p14:creationId xmlns:p14="http://schemas.microsoft.com/office/powerpoint/2010/main" val="1445585874"/>
+        <p14:creationId xmlns:p14="http://schemas.microsoft.com/office/powerpoint/2010/main" val="1766059848"/>
       </p:ext>
     </p:extLst>
   </p:cSld>
@@ -5584,7 +5584,7 @@
           <p:cNvPr id="23" name="">
             <a:extLst xmlns:a="http://schemas.openxmlformats.org/drawingml/2006/main">
               <a:ext uri="{FF2B5EF4-FFF2-40B4-BE49-F238E27FC236}">
-                <a16:creationId xmlns:a16="http://schemas.microsoft.com/office/drawing/2014/main" id="{B4FE4C68-B496-43C3-A83E-31FDF19C88DF}"/>
+                <a16:creationId xmlns:a16="http://schemas.microsoft.com/office/drawing/2014/main" id="{F538FB64-76E3-43B8-B7D4-223139938EB8}"/>
               </a:ext>
             </a:extLst>
           </p:cNvPr>
@@ -5616,7 +5616,7 @@
           <p:cNvPr id="2" name="">
             <a:extLst xmlns:a="http://schemas.openxmlformats.org/drawingml/2006/main">
               <a:ext uri="{FF2B5EF4-FFF2-40B4-BE49-F238E27FC236}">
-                <a16:creationId xmlns:a16="http://schemas.microsoft.com/office/drawing/2014/main" id="{EB11A27B-E22A-424C-8F04-AEFDBD2DF170}"/>
+                <a16:creationId xmlns:a16="http://schemas.microsoft.com/office/drawing/2014/main" id="{50E0183D-19CC-48A2-95F9-ABE1E6A90F4F}"/>
               </a:ext>
             </a:extLst>
           </p:cNvPr>
@@ -5673,7 +5673,7 @@
           <p:cNvPr id="3" name="">
             <a:extLst xmlns:a="http://schemas.openxmlformats.org/drawingml/2006/main">
               <a:ext uri="{FF2B5EF4-FFF2-40B4-BE49-F238E27FC236}">
-                <a16:creationId xmlns:a16="http://schemas.microsoft.com/office/drawing/2014/main" id="{42A0FC4B-1C52-43E4-9BB0-732842B5A21B}"/>
+                <a16:creationId xmlns:a16="http://schemas.microsoft.com/office/drawing/2014/main" id="{9290FE60-8B71-418C-8926-3642855776B6}"/>
               </a:ext>
             </a:extLst>
           </p:cNvPr>
@@ -5705,7 +5705,7 @@
           <p:cNvPr id="4" name="">
             <a:extLst xmlns:a="http://schemas.openxmlformats.org/drawingml/2006/main">
               <a:ext uri="{FF2B5EF4-FFF2-40B4-BE49-F238E27FC236}">
-                <a16:creationId xmlns:a16="http://schemas.microsoft.com/office/drawing/2014/main" id="{F3E7C04F-D584-459C-B47B-BCB70D707E7E}"/>
+                <a16:creationId xmlns:a16="http://schemas.microsoft.com/office/drawing/2014/main" id="{AB22B0E8-D229-4D6C-9EC6-B105074B9E41}"/>
               </a:ext>
             </a:extLst>
           </p:cNvPr>
@@ -5762,7 +5762,7 @@
           <p:cNvPr id="5" name="">
             <a:extLst xmlns:a="http://schemas.openxmlformats.org/drawingml/2006/main">
               <a:ext uri="{FF2B5EF4-FFF2-40B4-BE49-F238E27FC236}">
-                <a16:creationId xmlns:a16="http://schemas.microsoft.com/office/drawing/2014/main" id="{290DD705-A7A7-4991-AF5D-3B17F472D144}"/>
+                <a16:creationId xmlns:a16="http://schemas.microsoft.com/office/drawing/2014/main" id="{93079316-E692-4F04-A4C3-0C045FFFB089}"/>
               </a:ext>
             </a:extLst>
           </p:cNvPr>
@@ -5819,7 +5819,7 @@
           <p:cNvPr id="6" name="">
             <a:extLst xmlns:a="http://schemas.openxmlformats.org/drawingml/2006/main">
               <a:ext uri="{FF2B5EF4-FFF2-40B4-BE49-F238E27FC236}">
-                <a16:creationId xmlns:a16="http://schemas.microsoft.com/office/drawing/2014/main" id="{FAFBE0CB-CFBE-484D-A387-58698A4BC7C1}"/>
+                <a16:creationId xmlns:a16="http://schemas.microsoft.com/office/drawing/2014/main" id="{475EEFDC-E43B-4ADE-8D80-2B3104D8DD67}"/>
               </a:ext>
             </a:extLst>
           </p:cNvPr>
@@ -5876,7 +5876,7 @@
           <p:cNvPr id="7" name="">
             <a:extLst xmlns:a="http://schemas.openxmlformats.org/drawingml/2006/main">
               <a:ext uri="{FF2B5EF4-FFF2-40B4-BE49-F238E27FC236}">
-                <a16:creationId xmlns:a16="http://schemas.microsoft.com/office/drawing/2014/main" id="{DDE332C6-2F41-4F8A-98CA-1DB4AE792560}"/>
+                <a16:creationId xmlns:a16="http://schemas.microsoft.com/office/drawing/2014/main" id="{40951187-514B-44B7-A76E-92BE1AC83BE5}"/>
               </a:ext>
             </a:extLst>
           </p:cNvPr>
@@ -5908,7 +5908,7 @@
           <p:cNvPr id="8" name="">
             <a:extLst xmlns:a="http://schemas.openxmlformats.org/drawingml/2006/main">
               <a:ext uri="{FF2B5EF4-FFF2-40B4-BE49-F238E27FC236}">
-                <a16:creationId xmlns:a16="http://schemas.microsoft.com/office/drawing/2014/main" id="{BCCB4ABA-3BD8-44B6-B817-6AFE50853276}"/>
+                <a16:creationId xmlns:a16="http://schemas.microsoft.com/office/drawing/2014/main" id="{740EA9C6-AB96-4A8B-998E-46C9375DEEEE}"/>
               </a:ext>
             </a:extLst>
           </p:cNvPr>
@@ -5965,7 +5965,7 @@
           <p:cNvPr id="9" name="">
             <a:extLst xmlns:a="http://schemas.openxmlformats.org/drawingml/2006/main">
               <a:ext uri="{FF2B5EF4-FFF2-40B4-BE49-F238E27FC236}">
-                <a16:creationId xmlns:a16="http://schemas.microsoft.com/office/drawing/2014/main" id="{CE64C60A-4A6D-4DA2-8A85-0B73B9134BE1}"/>
+                <a16:creationId xmlns:a16="http://schemas.microsoft.com/office/drawing/2014/main" id="{79CEB35D-5D72-48A8-A307-40A9450E5FBD}"/>
               </a:ext>
             </a:extLst>
           </p:cNvPr>
@@ -6022,7 +6022,7 @@
           <p:cNvPr id="10" name="">
             <a:extLst xmlns:a="http://schemas.openxmlformats.org/drawingml/2006/main">
               <a:ext uri="{FF2B5EF4-FFF2-40B4-BE49-F238E27FC236}">
-                <a16:creationId xmlns:a16="http://schemas.microsoft.com/office/drawing/2014/main" id="{BF2810FA-1D3C-4B35-B460-F3BE38EDAFFE}"/>
+                <a16:creationId xmlns:a16="http://schemas.microsoft.com/office/drawing/2014/main" id="{E223D1E2-9B42-41C1-8B93-65C48FEF42B3}"/>
               </a:ext>
             </a:extLst>
           </p:cNvPr>
@@ -6056,7 +6056,7 @@
           <p:cNvPr id="11" name="">
             <a:extLst xmlns:a="http://schemas.openxmlformats.org/drawingml/2006/main">
               <a:ext uri="{FF2B5EF4-FFF2-40B4-BE49-F238E27FC236}">
-                <a16:creationId xmlns:a16="http://schemas.microsoft.com/office/drawing/2014/main" id="{09F6ADC3-1E72-4C59-93D4-9AFCC2A5F8D8}"/>
+                <a16:creationId xmlns:a16="http://schemas.microsoft.com/office/drawing/2014/main" id="{73C2EC51-A54A-4300-A53A-A1F57FA808F9}"/>
               </a:ext>
             </a:extLst>
           </p:cNvPr>
@@ -6088,7 +6088,7 @@
           <p:cNvPr id="12" name="">
             <a:extLst xmlns:a="http://schemas.openxmlformats.org/drawingml/2006/main">
               <a:ext uri="{FF2B5EF4-FFF2-40B4-BE49-F238E27FC236}">
-                <a16:creationId xmlns:a16="http://schemas.microsoft.com/office/drawing/2014/main" id="{ABC396C7-B10A-4A37-8B3C-2FF2E40C1359}"/>
+                <a16:creationId xmlns:a16="http://schemas.microsoft.com/office/drawing/2014/main" id="{2F6DD895-BF03-4E5D-89F1-B4A71D219FEC}"/>
               </a:ext>
             </a:extLst>
           </p:cNvPr>
@@ -6145,7 +6145,7 @@
           <p:cNvPr id="13" name="">
             <a:extLst xmlns:a="http://schemas.openxmlformats.org/drawingml/2006/main">
               <a:ext uri="{FF2B5EF4-FFF2-40B4-BE49-F238E27FC236}">
-                <a16:creationId xmlns:a16="http://schemas.microsoft.com/office/drawing/2014/main" id="{FEF1C301-ADFE-4E8F-880F-3AA3ED8DD264}"/>
+                <a16:creationId xmlns:a16="http://schemas.microsoft.com/office/drawing/2014/main" id="{26BC8355-E4DE-46D6-B502-03592EF47528}"/>
               </a:ext>
             </a:extLst>
           </p:cNvPr>
@@ -6202,7 +6202,7 @@
           <p:cNvPr id="14" name="">
             <a:extLst xmlns:a="http://schemas.openxmlformats.org/drawingml/2006/main">
               <a:ext uri="{FF2B5EF4-FFF2-40B4-BE49-F238E27FC236}">
-                <a16:creationId xmlns:a16="http://schemas.microsoft.com/office/drawing/2014/main" id="{03DC9D82-74CF-4D7C-B409-160E300F2AF0}"/>
+                <a16:creationId xmlns:a16="http://schemas.microsoft.com/office/drawing/2014/main" id="{74FDC60A-12B3-4341-A861-C09554845E78}"/>
               </a:ext>
             </a:extLst>
           </p:cNvPr>
@@ -6236,7 +6236,7 @@
           <p:cNvPr id="15" name="">
             <a:extLst xmlns:a="http://schemas.openxmlformats.org/drawingml/2006/main">
               <a:ext uri="{FF2B5EF4-FFF2-40B4-BE49-F238E27FC236}">
-                <a16:creationId xmlns:a16="http://schemas.microsoft.com/office/drawing/2014/main" id="{7C2F7603-E517-48DB-8B0F-3EAAD27D3A03}"/>
+                <a16:creationId xmlns:a16="http://schemas.microsoft.com/office/drawing/2014/main" id="{AD705BB1-40FC-4D66-863D-614D372ED962}"/>
               </a:ext>
             </a:extLst>
           </p:cNvPr>
@@ -6268,7 +6268,7 @@
           <p:cNvPr id="16" name="">
             <a:extLst xmlns:a="http://schemas.openxmlformats.org/drawingml/2006/main">
               <a:ext uri="{FF2B5EF4-FFF2-40B4-BE49-F238E27FC236}">
-                <a16:creationId xmlns:a16="http://schemas.microsoft.com/office/drawing/2014/main" id="{8E6A7BA7-78E6-4D47-B573-F12050545260}"/>
+                <a16:creationId xmlns:a16="http://schemas.microsoft.com/office/drawing/2014/main" id="{41064FA3-188E-4EB1-A25D-50EB3D19DD5C}"/>
               </a:ext>
             </a:extLst>
           </p:cNvPr>
@@ -6325,7 +6325,7 @@
           <p:cNvPr id="17" name="">
             <a:extLst xmlns:a="http://schemas.openxmlformats.org/drawingml/2006/main">
               <a:ext uri="{FF2B5EF4-FFF2-40B4-BE49-F238E27FC236}">
-                <a16:creationId xmlns:a16="http://schemas.microsoft.com/office/drawing/2014/main" id="{9ED63F51-F09A-40DF-A8A4-6ECD0E36EBFE}"/>
+                <a16:creationId xmlns:a16="http://schemas.microsoft.com/office/drawing/2014/main" id="{F83EF5F3-A8A5-439A-B79B-3158CB90B1BC}"/>
               </a:ext>
             </a:extLst>
           </p:cNvPr>
@@ -6382,7 +6382,7 @@
           <p:cNvPr id="18" name="">
             <a:extLst xmlns:a="http://schemas.openxmlformats.org/drawingml/2006/main">
               <a:ext uri="{FF2B5EF4-FFF2-40B4-BE49-F238E27FC236}">
-                <a16:creationId xmlns:a16="http://schemas.microsoft.com/office/drawing/2014/main" id="{D8B01451-9260-4D5B-B769-DCEB6EE2C06D}"/>
+                <a16:creationId xmlns:a16="http://schemas.microsoft.com/office/drawing/2014/main" id="{277A478B-CE0A-4E04-A8DE-C26423519A2B}"/>
               </a:ext>
             </a:extLst>
           </p:cNvPr>
@@ -6416,7 +6416,7 @@
           <p:cNvPr id="19" name="">
             <a:extLst xmlns:a="http://schemas.openxmlformats.org/drawingml/2006/main">
               <a:ext uri="{FF2B5EF4-FFF2-40B4-BE49-F238E27FC236}">
-                <a16:creationId xmlns:a16="http://schemas.microsoft.com/office/drawing/2014/main" id="{8AD241AD-84E2-4C0C-B709-CF5AE993C11E}"/>
+                <a16:creationId xmlns:a16="http://schemas.microsoft.com/office/drawing/2014/main" id="{D77601CC-8919-4569-BE34-FC4E6D29B40C}"/>
               </a:ext>
             </a:extLst>
           </p:cNvPr>
@@ -6448,7 +6448,7 @@
           <p:cNvPr id="20" name="">
             <a:extLst xmlns:a="http://schemas.openxmlformats.org/drawingml/2006/main">
               <a:ext uri="{FF2B5EF4-FFF2-40B4-BE49-F238E27FC236}">
-                <a16:creationId xmlns:a16="http://schemas.microsoft.com/office/drawing/2014/main" id="{99A346E4-EA15-40CF-9F69-4AC77D1CD8BC}"/>
+                <a16:creationId xmlns:a16="http://schemas.microsoft.com/office/drawing/2014/main" id="{ADFA1831-E66B-4C28-9E8C-7AE98B183519}"/>
               </a:ext>
             </a:extLst>
           </p:cNvPr>
@@ -6505,7 +6505,7 @@
           <p:cNvPr id="21" name="">
             <a:extLst xmlns:a="http://schemas.openxmlformats.org/drawingml/2006/main">
               <a:ext uri="{FF2B5EF4-FFF2-40B4-BE49-F238E27FC236}">
-                <a16:creationId xmlns:a16="http://schemas.microsoft.com/office/drawing/2014/main" id="{6FD9E12B-0175-46DC-AA15-2739A079CDB7}"/>
+                <a16:creationId xmlns:a16="http://schemas.microsoft.com/office/drawing/2014/main" id="{0DB88F64-1ABD-4B49-9633-CC8804CAACF3}"/>
               </a:ext>
             </a:extLst>
           </p:cNvPr>
@@ -6562,7 +6562,7 @@
           <p:cNvPr id="22" name="">
             <a:extLst xmlns:a="http://schemas.openxmlformats.org/drawingml/2006/main">
               <a:ext uri="{FF2B5EF4-FFF2-40B4-BE49-F238E27FC236}">
-                <a16:creationId xmlns:a16="http://schemas.microsoft.com/office/drawing/2014/main" id="{D9FB36B5-A718-44FF-A6C8-9FFE58836B54}"/>
+                <a16:creationId xmlns:a16="http://schemas.microsoft.com/office/drawing/2014/main" id="{E48E240F-1540-4615-954D-8A00EC5C9926}"/>
               </a:ext>
             </a:extLst>
           </p:cNvPr>
@@ -6617,7 +6617,7 @@
     </p:spTree>
     <p:extLst>
       <p:ext uri="{BB962C8B-B14F-4D97-AF65-F5344CB8AC3E}">
-        <p14:creationId xmlns:p14="http://schemas.microsoft.com/office/powerpoint/2010/main" val="1659381224"/>
+        <p14:creationId xmlns:p14="http://schemas.microsoft.com/office/powerpoint/2010/main" val="485204449"/>
       </p:ext>
     </p:extLst>
   </p:cSld>
@@ -6818,7 +6818,7 @@
           <p:cNvPr id="16" name="">
             <a:extLst xmlns:a="http://schemas.openxmlformats.org/drawingml/2006/main">
               <a:ext uri="{FF2B5EF4-FFF2-40B4-BE49-F238E27FC236}">
-                <a16:creationId xmlns:a16="http://schemas.microsoft.com/office/drawing/2014/main" id="{406AF6B8-0C75-4A68-8EA9-E77A750B3CF1}"/>
+                <a16:creationId xmlns:a16="http://schemas.microsoft.com/office/drawing/2014/main" id="{370ED668-F100-42FD-8632-14936A4F8B2C}"/>
               </a:ext>
             </a:extLst>
           </p:cNvPr>
@@ -6850,7 +6850,7 @@
           <p:cNvPr id="2" name="">
             <a:extLst xmlns:a="http://schemas.openxmlformats.org/drawingml/2006/main">
               <a:ext uri="{FF2B5EF4-FFF2-40B4-BE49-F238E27FC236}">
-                <a16:creationId xmlns:a16="http://schemas.microsoft.com/office/drawing/2014/main" id="{CB2E66B6-819E-43BF-AB51-5422075BCD90}"/>
+                <a16:creationId xmlns:a16="http://schemas.microsoft.com/office/drawing/2014/main" id="{FA38A7F6-F0F2-4875-9256-7D8244847AD8}"/>
               </a:ext>
             </a:extLst>
           </p:cNvPr>
@@ -6907,7 +6907,7 @@
           <p:cNvPr id="3" name="">
             <a:extLst xmlns:a="http://schemas.openxmlformats.org/drawingml/2006/main">
               <a:ext uri="{FF2B5EF4-FFF2-40B4-BE49-F238E27FC236}">
-                <a16:creationId xmlns:a16="http://schemas.microsoft.com/office/drawing/2014/main" id="{697025C4-5232-4427-817F-234537731715}"/>
+                <a16:creationId xmlns:a16="http://schemas.microsoft.com/office/drawing/2014/main" id="{0494A550-80C1-4B7B-9E0C-65665EAF860A}"/>
               </a:ext>
             </a:extLst>
           </p:cNvPr>
@@ -6939,7 +6939,7 @@
           <p:cNvPr id="4" name="">
             <a:extLst xmlns:a="http://schemas.openxmlformats.org/drawingml/2006/main">
               <a:ext uri="{FF2B5EF4-FFF2-40B4-BE49-F238E27FC236}">
-                <a16:creationId xmlns:a16="http://schemas.microsoft.com/office/drawing/2014/main" id="{069B0EDF-0ABE-4A18-B68C-385503007C2D}"/>
+                <a16:creationId xmlns:a16="http://schemas.microsoft.com/office/drawing/2014/main" id="{17DF4623-A2B4-4DC8-945B-C512CEB7B597}"/>
               </a:ext>
             </a:extLst>
           </p:cNvPr>
@@ -6996,7 +6996,7 @@
           <p:cNvPr id="5" name="">
             <a:extLst xmlns:a="http://schemas.openxmlformats.org/drawingml/2006/main">
               <a:ext uri="{FF2B5EF4-FFF2-40B4-BE49-F238E27FC236}">
-                <a16:creationId xmlns:a16="http://schemas.microsoft.com/office/drawing/2014/main" id="{E05C41B9-BFD0-4085-B29E-59D29BAB1C26}"/>
+                <a16:creationId xmlns:a16="http://schemas.microsoft.com/office/drawing/2014/main" id="{742B0EF5-86D4-42EF-9EF0-D5966B19C1D9}"/>
               </a:ext>
             </a:extLst>
           </p:cNvPr>
@@ -7053,7 +7053,7 @@
           <p:cNvPr id="6" name="">
             <a:extLst xmlns:a="http://schemas.openxmlformats.org/drawingml/2006/main">
               <a:ext uri="{FF2B5EF4-FFF2-40B4-BE49-F238E27FC236}">
-                <a16:creationId xmlns:a16="http://schemas.microsoft.com/office/drawing/2014/main" id="{44A4E788-F8CF-46F7-8D82-D75FF6390632}"/>
+                <a16:creationId xmlns:a16="http://schemas.microsoft.com/office/drawing/2014/main" id="{83C437BE-0735-456B-A5C4-D74C044D3743}"/>
               </a:ext>
             </a:extLst>
           </p:cNvPr>
@@ -7110,7 +7110,7 @@
           <p:cNvPr id="7" name="">
             <a:extLst xmlns:a="http://schemas.openxmlformats.org/drawingml/2006/main">
               <a:ext uri="{FF2B5EF4-FFF2-40B4-BE49-F238E27FC236}">
-                <a16:creationId xmlns:a16="http://schemas.microsoft.com/office/drawing/2014/main" id="{1CD9AB5C-F5AF-4A57-BA1C-F2E87A9ABD74}"/>
+                <a16:creationId xmlns:a16="http://schemas.microsoft.com/office/drawing/2014/main" id="{C6AD8938-492D-4F2E-95D6-8CD8AB57B1D7}"/>
               </a:ext>
             </a:extLst>
           </p:cNvPr>
@@ -7142,7 +7142,7 @@
           <p:cNvPr id="8" name="">
             <a:extLst xmlns:a="http://schemas.openxmlformats.org/drawingml/2006/main">
               <a:ext uri="{FF2B5EF4-FFF2-40B4-BE49-F238E27FC236}">
-                <a16:creationId xmlns:a16="http://schemas.microsoft.com/office/drawing/2014/main" id="{6A620DDD-BE41-4615-9DD9-50F3BB83B934}"/>
+                <a16:creationId xmlns:a16="http://schemas.microsoft.com/office/drawing/2014/main" id="{1B88FA27-8459-4BF2-8939-4E9C4EAFD394}"/>
               </a:ext>
             </a:extLst>
           </p:cNvPr>
@@ -7199,7 +7199,7 @@
           <p:cNvPr id="9" name="">
             <a:extLst xmlns:a="http://schemas.openxmlformats.org/drawingml/2006/main">
               <a:ext uri="{FF2B5EF4-FFF2-40B4-BE49-F238E27FC236}">
-                <a16:creationId xmlns:a16="http://schemas.microsoft.com/office/drawing/2014/main" id="{1D0F714B-6162-4011-AF32-69E6FAC2CB54}"/>
+                <a16:creationId xmlns:a16="http://schemas.microsoft.com/office/drawing/2014/main" id="{7213BC4D-9859-4B2D-8E0B-BDF81B087A66}"/>
               </a:ext>
             </a:extLst>
           </p:cNvPr>
@@ -7256,7 +7256,7 @@
           <p:cNvPr id="10" name="">
             <a:extLst xmlns:a="http://schemas.openxmlformats.org/drawingml/2006/main">
               <a:ext uri="{FF2B5EF4-FFF2-40B4-BE49-F238E27FC236}">
-                <a16:creationId xmlns:a16="http://schemas.microsoft.com/office/drawing/2014/main" id="{8CC3A997-EBF8-4EA0-922B-EDB15F70C380}"/>
+                <a16:creationId xmlns:a16="http://schemas.microsoft.com/office/drawing/2014/main" id="{84E26B9A-5AED-4EFE-A279-63615387A757}"/>
               </a:ext>
             </a:extLst>
           </p:cNvPr>
@@ -7313,7 +7313,7 @@
           <p:cNvPr id="11" name="">
             <a:extLst xmlns:a="http://schemas.openxmlformats.org/drawingml/2006/main">
               <a:ext uri="{FF2B5EF4-FFF2-40B4-BE49-F238E27FC236}">
-                <a16:creationId xmlns:a16="http://schemas.microsoft.com/office/drawing/2014/main" id="{680FA9BB-FBF7-46BB-B404-FD1DF2416639}"/>
+                <a16:creationId xmlns:a16="http://schemas.microsoft.com/office/drawing/2014/main" id="{DF1A8AC8-30B7-4ACA-9DE4-8EBB3CADCE52}"/>
               </a:ext>
             </a:extLst>
           </p:cNvPr>
@@ -7345,7 +7345,7 @@
           <p:cNvPr id="12" name="">
             <a:extLst xmlns:a="http://schemas.openxmlformats.org/drawingml/2006/main">
               <a:ext uri="{FF2B5EF4-FFF2-40B4-BE49-F238E27FC236}">
-                <a16:creationId xmlns:a16="http://schemas.microsoft.com/office/drawing/2014/main" id="{D171C66C-D4FA-42E6-89A9-0F54D1C0D727}"/>
+                <a16:creationId xmlns:a16="http://schemas.microsoft.com/office/drawing/2014/main" id="{49F1B09B-1EF3-4BC1-A40A-792492444FDE}"/>
               </a:ext>
             </a:extLst>
           </p:cNvPr>
@@ -7402,7 +7402,7 @@
           <p:cNvPr id="13" name="">
             <a:extLst xmlns:a="http://schemas.openxmlformats.org/drawingml/2006/main">
               <a:ext uri="{FF2B5EF4-FFF2-40B4-BE49-F238E27FC236}">
-                <a16:creationId xmlns:a16="http://schemas.microsoft.com/office/drawing/2014/main" id="{227EF7DB-D896-4D5A-BC74-BFA4BD75DA8F}"/>
+                <a16:creationId xmlns:a16="http://schemas.microsoft.com/office/drawing/2014/main" id="{802A0678-6237-45AE-9CCA-0E43DB1058E6}"/>
               </a:ext>
             </a:extLst>
           </p:cNvPr>
@@ -7459,7 +7459,7 @@
           <p:cNvPr id="14" name="">
             <a:extLst xmlns:a="http://schemas.openxmlformats.org/drawingml/2006/main">
               <a:ext uri="{FF2B5EF4-FFF2-40B4-BE49-F238E27FC236}">
-                <a16:creationId xmlns:a16="http://schemas.microsoft.com/office/drawing/2014/main" id="{19177970-35EC-45E2-9A90-B2323B0D43D5}"/>
+                <a16:creationId xmlns:a16="http://schemas.microsoft.com/office/drawing/2014/main" id="{C111D7C3-5DBC-4D2A-BFBA-2E6A6135B87D}"/>
               </a:ext>
             </a:extLst>
           </p:cNvPr>
@@ -7516,7 +7516,7 @@
           <p:cNvPr id="15" name="">
             <a:extLst xmlns:a="http://schemas.openxmlformats.org/drawingml/2006/main">
               <a:ext uri="{FF2B5EF4-FFF2-40B4-BE49-F238E27FC236}">
-                <a16:creationId xmlns:a16="http://schemas.microsoft.com/office/drawing/2014/main" id="{45AD0EDD-4BBD-4539-AA87-A8FCAA983D79}"/>
+                <a16:creationId xmlns:a16="http://schemas.microsoft.com/office/drawing/2014/main" id="{02815210-3664-46AB-99E5-5D21C6C7EDEC}"/>
               </a:ext>
             </a:extLst>
           </p:cNvPr>
@@ -7571,7 +7571,7 @@
     </p:spTree>
     <p:extLst>
       <p:ext uri="{BB962C8B-B14F-4D97-AF65-F5344CB8AC3E}">
-        <p14:creationId xmlns:p14="http://schemas.microsoft.com/office/powerpoint/2010/main" val="990377128"/>
+        <p14:creationId xmlns:p14="http://schemas.microsoft.com/office/powerpoint/2010/main" val="167163622"/>
       </p:ext>
     </p:extLst>
   </p:cSld>
@@ -7769,10 +7769,10 @@
       </p:grpSpPr>
       <p:sp>
         <p:nvSpPr>
-          <p:cNvPr id="23" name="">
-            <a:extLst xmlns:a="http://schemas.openxmlformats.org/drawingml/2006/main">
-              <a:ext uri="{FF2B5EF4-FFF2-40B4-BE49-F238E27FC236}">
-                <a16:creationId xmlns:a16="http://schemas.microsoft.com/office/drawing/2014/main" id="{9B31F1A0-8410-496F-9CFB-2801AC23AF06}"/>
+          <p:cNvPr id="26" name="">
+            <a:extLst xmlns:a="http://schemas.openxmlformats.org/drawingml/2006/main">
+              <a:ext uri="{FF2B5EF4-FFF2-40B4-BE49-F238E27FC236}">
+                <a16:creationId xmlns:a16="http://schemas.microsoft.com/office/drawing/2014/main" id="{2C4A0ADF-4C89-46E6-BE18-E7EA95194D89}"/>
               </a:ext>
             </a:extLst>
           </p:cNvPr>
@@ -7804,7 +7804,7 @@
           <p:cNvPr id="2" name="">
             <a:extLst xmlns:a="http://schemas.openxmlformats.org/drawingml/2006/main">
               <a:ext uri="{FF2B5EF4-FFF2-40B4-BE49-F238E27FC236}">
-                <a16:creationId xmlns:a16="http://schemas.microsoft.com/office/drawing/2014/main" id="{2D078B52-867B-414F-B71F-D91C9F3FE4C3}"/>
+                <a16:creationId xmlns:a16="http://schemas.microsoft.com/office/drawing/2014/main" id="{14B3EEAC-2B6D-4710-A235-BD4F55C5640F}"/>
               </a:ext>
             </a:extLst>
           </p:cNvPr>
@@ -7861,7 +7861,7 @@
           <p:cNvPr id="3" name="">
             <a:extLst xmlns:a="http://schemas.openxmlformats.org/drawingml/2006/main">
               <a:ext uri="{FF2B5EF4-FFF2-40B4-BE49-F238E27FC236}">
-                <a16:creationId xmlns:a16="http://schemas.microsoft.com/office/drawing/2014/main" id="{D6500986-DF20-42FC-8832-E67A23C945C0}"/>
+                <a16:creationId xmlns:a16="http://schemas.microsoft.com/office/drawing/2014/main" id="{91CD35F3-BAF6-4F82-9269-92C78FD93D83}"/>
               </a:ext>
             </a:extLst>
           </p:cNvPr>
@@ -7893,7 +7893,7 @@
           <p:cNvPr id="4" name="">
             <a:extLst xmlns:a="http://schemas.openxmlformats.org/drawingml/2006/main">
               <a:ext uri="{FF2B5EF4-FFF2-40B4-BE49-F238E27FC236}">
-                <a16:creationId xmlns:a16="http://schemas.microsoft.com/office/drawing/2014/main" id="{6F71C055-021C-4CFD-9877-AB0A358DC7A7}"/>
+                <a16:creationId xmlns:a16="http://schemas.microsoft.com/office/drawing/2014/main" id="{173957A0-8D67-41EB-A118-FF25CB608F9F}"/>
               </a:ext>
             </a:extLst>
           </p:cNvPr>
@@ -7950,7 +7950,7 @@
           <p:cNvPr id="5" name="">
             <a:extLst xmlns:a="http://schemas.openxmlformats.org/drawingml/2006/main">
               <a:ext uri="{FF2B5EF4-FFF2-40B4-BE49-F238E27FC236}">
-                <a16:creationId xmlns:a16="http://schemas.microsoft.com/office/drawing/2014/main" id="{507C3944-5CDA-4DD8-BD2E-2E21140431FE}"/>
+                <a16:creationId xmlns:a16="http://schemas.microsoft.com/office/drawing/2014/main" id="{6C9FF289-7B26-4BDA-951A-6F8AE03464E9}"/>
               </a:ext>
             </a:extLst>
           </p:cNvPr>
@@ -8007,7 +8007,7 @@
           <p:cNvPr id="6" name="">
             <a:extLst xmlns:a="http://schemas.openxmlformats.org/drawingml/2006/main">
               <a:ext uri="{FF2B5EF4-FFF2-40B4-BE49-F238E27FC236}">
-                <a16:creationId xmlns:a16="http://schemas.microsoft.com/office/drawing/2014/main" id="{9CA1C98B-778E-4F1A-AE5B-3AB9D162963F}"/>
+                <a16:creationId xmlns:a16="http://schemas.microsoft.com/office/drawing/2014/main" id="{F0678631-F4E4-453E-9EF1-A46A083B1450}"/>
               </a:ext>
             </a:extLst>
           </p:cNvPr>
@@ -8064,7 +8064,7 @@
           <p:cNvPr id="7" name="">
             <a:extLst xmlns:a="http://schemas.openxmlformats.org/drawingml/2006/main">
               <a:ext uri="{FF2B5EF4-FFF2-40B4-BE49-F238E27FC236}">
-                <a16:creationId xmlns:a16="http://schemas.microsoft.com/office/drawing/2014/main" id="{6BDCA4B3-AB6D-4736-8651-615705C9C1F6}"/>
+                <a16:creationId xmlns:a16="http://schemas.microsoft.com/office/drawing/2014/main" id="{FEA0E7E8-480E-4EFF-83C8-76B09602EDEF}"/>
               </a:ext>
             </a:extLst>
           </p:cNvPr>
@@ -8096,7 +8096,7 @@
           <p:cNvPr id="8" name="">
             <a:extLst xmlns:a="http://schemas.openxmlformats.org/drawingml/2006/main">
               <a:ext uri="{FF2B5EF4-FFF2-40B4-BE49-F238E27FC236}">
-                <a16:creationId xmlns:a16="http://schemas.microsoft.com/office/drawing/2014/main" id="{EDB7FEFB-0230-474E-A096-B50F9B1B5782}"/>
+                <a16:creationId xmlns:a16="http://schemas.microsoft.com/office/drawing/2014/main" id="{687F2133-28BA-466B-9834-036D43D0D5FA}"/>
               </a:ext>
             </a:extLst>
           </p:cNvPr>
@@ -8153,7 +8153,7 @@
           <p:cNvPr id="9" name="">
             <a:extLst xmlns:a="http://schemas.openxmlformats.org/drawingml/2006/main">
               <a:ext uri="{FF2B5EF4-FFF2-40B4-BE49-F238E27FC236}">
-                <a16:creationId xmlns:a16="http://schemas.microsoft.com/office/drawing/2014/main" id="{E5A088CC-DF7C-4145-ADEB-0D9DFC9E4E65}"/>
+                <a16:creationId xmlns:a16="http://schemas.microsoft.com/office/drawing/2014/main" id="{75D15F33-D64F-4583-B2CC-5E1B0EE88A8E}"/>
               </a:ext>
             </a:extLst>
           </p:cNvPr>
@@ -8210,19 +8210,19 @@
           <p:cNvPr id="10" name="">
             <a:extLst xmlns:a="http://schemas.openxmlformats.org/drawingml/2006/main">
               <a:ext uri="{FF2B5EF4-FFF2-40B4-BE49-F238E27FC236}">
-                <a16:creationId xmlns:a16="http://schemas.microsoft.com/office/drawing/2014/main" id="{78FD5A81-A99D-4C40-97D9-9454FAA854BC}"/>
-              </a:ext>
-            </a:extLst>
-          </p:cNvPr>
-          <p:cNvSpPr>
-            <a:spLocks xmlns:a="http://schemas.openxmlformats.org/drawingml/2006/main" noGrp="1"/>
-          </p:cNvSpPr>
-          <p:nvPr/>
-        </p:nvSpPr>
-        <p:spPr>
-          <a:xfrm xmlns:a="http://schemas.openxmlformats.org/drawingml/2006/main">
-            <a:off x="914400" y="1257300"/>
-            <a:ext cx="10363200" cy="781050"/>
+                <a16:creationId xmlns:a16="http://schemas.microsoft.com/office/drawing/2014/main" id="{78EA99B1-55D6-45EB-82B2-6925E57ECC91}"/>
+              </a:ext>
+            </a:extLst>
+          </p:cNvPr>
+          <p:cNvSpPr>
+            <a:spLocks xmlns:a="http://schemas.openxmlformats.org/drawingml/2006/main" noGrp="1"/>
+          </p:cNvSpPr>
+          <p:nvPr/>
+        </p:nvSpPr>
+        <p:spPr>
+          <a:xfrm xmlns:a="http://schemas.openxmlformats.org/drawingml/2006/main">
+            <a:off x="857250" y="1219200"/>
+            <a:ext cx="10477500" cy="742950"/>
           </a:xfrm>
           <a:prstGeom xmlns:a="http://schemas.openxmlformats.org/drawingml/2006/main" prst="rect">
             <a:avLst/>
@@ -8239,7 +8239,7 @@
           <a:lstStyle xmlns:a="http://schemas.openxmlformats.org/drawingml/2006/main"/>
           <a:p xmlns:a="http://schemas.openxmlformats.org/drawingml/2006/main">
             <a:pPr algn="ctr">
-              <a:defRPr sz="2175" b="1">
+              <a:defRPr sz="2100" b="1">
                 <a:solidFill>
                   <a:srgbClr val="17253A"/>
                 </a:solidFill>
@@ -8249,7 +8249,7 @@
               </a:defRPr>
             </a:pPr>
             <a:r>
-              <a:rPr sz="2175" b="1">
+              <a:rPr sz="2100" b="1">
                 <a:solidFill>
                   <a:srgbClr val="17253A"/>
                 </a:solidFill>
@@ -8267,28 +8267,30 @@
           <p:cNvPr id="11" name="">
             <a:extLst xmlns:a="http://schemas.openxmlformats.org/drawingml/2006/main">
               <a:ext uri="{FF2B5EF4-FFF2-40B4-BE49-F238E27FC236}">
-                <a16:creationId xmlns:a16="http://schemas.microsoft.com/office/drawing/2014/main" id="{22EACC46-F5F8-4089-97F5-52B01DF57EB5}"/>
-              </a:ext>
-            </a:extLst>
-          </p:cNvPr>
-          <p:cNvSpPr>
-            <a:spLocks xmlns:a="http://schemas.openxmlformats.org/drawingml/2006/main" noGrp="1"/>
-          </p:cNvSpPr>
-          <p:nvPr/>
-        </p:nvSpPr>
-        <p:spPr>
-          <a:xfrm xmlns:a="http://schemas.openxmlformats.org/drawingml/2006/main">
-            <a:off x="1000125" y="2247900"/>
-            <a:ext cx="476250" cy="476250"/>
-          </a:xfrm>
-          <a:prstGeom xmlns:a="http://schemas.openxmlformats.org/drawingml/2006/main" prst="ellipse">
+                <a16:creationId xmlns:a16="http://schemas.microsoft.com/office/drawing/2014/main" id="{A44D16F9-9182-4879-920F-5D36FC5F5B82}"/>
+              </a:ext>
+            </a:extLst>
+          </p:cNvPr>
+          <p:cNvSpPr>
+            <a:spLocks xmlns:a="http://schemas.openxmlformats.org/drawingml/2006/main" noGrp="1"/>
+          </p:cNvSpPr>
+          <p:nvPr/>
+        </p:nvSpPr>
+        <p:spPr>
+          <a:xfrm xmlns:a="http://schemas.openxmlformats.org/drawingml/2006/main">
+            <a:off x="971550" y="2124075"/>
+            <a:ext cx="38100" cy="3524250"/>
+          </a:xfrm>
+          <a:prstGeom xmlns:a="http://schemas.openxmlformats.org/drawingml/2006/main" prst="rect">
             <a:avLst/>
           </a:prstGeom>
           <a:solidFill xmlns:a="http://schemas.openxmlformats.org/drawingml/2006/main">
-            <a:srgbClr val="18324A"/>
+            <a:srgbClr val="2C6E73"/>
           </a:solidFill>
           <a:ln xmlns:a="http://schemas.openxmlformats.org/drawingml/2006/main" w="0">
-            <a:noFill/>
+            <a:solidFill>
+              <a:srgbClr val="2C6E73"/>
+            </a:solidFill>
           </a:ln>
         </p:spPr>
       </p:sp>
@@ -8297,19 +8299,19 @@
           <p:cNvPr id="12" name="">
             <a:extLst xmlns:a="http://schemas.openxmlformats.org/drawingml/2006/main">
               <a:ext uri="{FF2B5EF4-FFF2-40B4-BE49-F238E27FC236}">
-                <a16:creationId xmlns:a16="http://schemas.microsoft.com/office/drawing/2014/main" id="{F59EEB5D-0DE9-4EC4-A5BE-0CEDE449E4EA}"/>
-              </a:ext>
-            </a:extLst>
-          </p:cNvPr>
-          <p:cNvSpPr>
-            <a:spLocks xmlns:a="http://schemas.openxmlformats.org/drawingml/2006/main" noGrp="1"/>
-          </p:cNvSpPr>
-          <p:nvPr/>
-        </p:nvSpPr>
-        <p:spPr>
-          <a:xfrm xmlns:a="http://schemas.openxmlformats.org/drawingml/2006/main">
-            <a:off x="1000125" y="2276475"/>
-            <a:ext cx="476250" cy="419100"/>
+                <a16:creationId xmlns:a16="http://schemas.microsoft.com/office/drawing/2014/main" id="{1769DD94-F4DD-4343-9810-6BCDA420B3A7}"/>
+              </a:ext>
+            </a:extLst>
+          </p:cNvPr>
+          <p:cNvSpPr>
+            <a:spLocks xmlns:a="http://schemas.openxmlformats.org/drawingml/2006/main" noGrp="1"/>
+          </p:cNvSpPr>
+          <p:nvPr/>
+        </p:nvSpPr>
+        <p:spPr>
+          <a:xfrm xmlns:a="http://schemas.openxmlformats.org/drawingml/2006/main">
+            <a:off x="1162050" y="2200275"/>
+            <a:ext cx="400050" cy="400050"/>
           </a:xfrm>
           <a:prstGeom xmlns:a="http://schemas.openxmlformats.org/drawingml/2006/main" prst="rect">
             <a:avLst/>
@@ -8326,9 +8328,9 @@
           <a:lstStyle xmlns:a="http://schemas.openxmlformats.org/drawingml/2006/main"/>
           <a:p xmlns:a="http://schemas.openxmlformats.org/drawingml/2006/main">
             <a:pPr algn="ctr">
-              <a:defRPr sz="1350" b="1">
-                <a:solidFill>
-                  <a:srgbClr val="FFFFFF"/>
+              <a:defRPr sz="1125" b="1">
+                <a:solidFill>
+                  <a:srgbClr val="2C6E73"/>
                 </a:solidFill>
                 <a:latin typeface="Arial"/>
                 <a:ea typeface="Arial"/>
@@ -8336,9 +8338,9 @@
               </a:defRPr>
             </a:pPr>
             <a:r>
-              <a:rPr sz="1350" b="1">
-                <a:solidFill>
-                  <a:srgbClr val="FFFFFF"/>
+              <a:rPr sz="1125" b="1">
+                <a:solidFill>
+                  <a:srgbClr val="2C6E73"/>
                 </a:solidFill>
                 <a:latin typeface="Arial"/>
                 <a:ea typeface="Arial"/>
@@ -8354,19 +8356,19 @@
           <p:cNvPr id="13" name="">
             <a:extLst xmlns:a="http://schemas.openxmlformats.org/drawingml/2006/main">
               <a:ext uri="{FF2B5EF4-FFF2-40B4-BE49-F238E27FC236}">
-                <a16:creationId xmlns:a16="http://schemas.microsoft.com/office/drawing/2014/main" id="{B99E61CC-6326-4BE0-A87A-E7087C0BE660}"/>
-              </a:ext>
-            </a:extLst>
-          </p:cNvPr>
-          <p:cNvSpPr>
-            <a:spLocks xmlns:a="http://schemas.openxmlformats.org/drawingml/2006/main" noGrp="1"/>
-          </p:cNvSpPr>
-          <p:nvPr/>
-        </p:nvSpPr>
-        <p:spPr>
-          <a:xfrm xmlns:a="http://schemas.openxmlformats.org/drawingml/2006/main">
-            <a:off x="1714500" y="2181225"/>
-            <a:ext cx="9429750" cy="609600"/>
+                <a16:creationId xmlns:a16="http://schemas.microsoft.com/office/drawing/2014/main" id="{F278EDE1-F347-414C-BBEB-0C03C0FEE744}"/>
+              </a:ext>
+            </a:extLst>
+          </p:cNvPr>
+          <p:cNvSpPr>
+            <a:spLocks xmlns:a="http://schemas.openxmlformats.org/drawingml/2006/main" noGrp="1"/>
+          </p:cNvSpPr>
+          <p:nvPr/>
+        </p:nvSpPr>
+        <p:spPr>
+          <a:xfrm xmlns:a="http://schemas.openxmlformats.org/drawingml/2006/main">
+            <a:off x="1714500" y="2114550"/>
+            <a:ext cx="9525000" cy="638175"/>
           </a:xfrm>
           <a:prstGeom xmlns:a="http://schemas.openxmlformats.org/drawingml/2006/main" prst="rect">
             <a:avLst/>
@@ -8383,7 +8385,7 @@
           <a:lstStyle xmlns:a="http://schemas.openxmlformats.org/drawingml/2006/main"/>
           <a:p xmlns:a="http://schemas.openxmlformats.org/drawingml/2006/main">
             <a:pPr algn="l">
-              <a:defRPr sz="1500" b="0">
+              <a:defRPr sz="1575" b="0">
                 <a:solidFill>
                   <a:srgbClr val="17253A"/>
                 </a:solidFill>
@@ -8393,7 +8395,7 @@
               </a:defRPr>
             </a:pPr>
             <a:r>
-              <a:rPr sz="1500" b="0">
+              <a:rPr sz="1575" b="0">
                 <a:solidFill>
                   <a:srgbClr val="17253A"/>
                 </a:solidFill>
@@ -8401,7 +8403,7 @@
                 <a:ea typeface="Arial"/>
                 <a:cs typeface="Arial"/>
               </a:rPr>
-              <a:t>Identify the structure: Align digits by place value and include placeholder zeros.</a:t>
+              <a:t>28.56 ÷ 8</a:t>
             </a:r>
           </a:p>
         </p:txBody>
@@ -8411,28 +8413,30 @@
           <p:cNvPr id="14" name="">
             <a:extLst xmlns:a="http://schemas.openxmlformats.org/drawingml/2006/main">
               <a:ext uri="{FF2B5EF4-FFF2-40B4-BE49-F238E27FC236}">
-                <a16:creationId xmlns:a16="http://schemas.microsoft.com/office/drawing/2014/main" id="{1F30AFE7-81FD-4C99-83FE-90C1751C963A}"/>
-              </a:ext>
-            </a:extLst>
-          </p:cNvPr>
-          <p:cNvSpPr>
-            <a:spLocks xmlns:a="http://schemas.openxmlformats.org/drawingml/2006/main" noGrp="1"/>
-          </p:cNvSpPr>
-          <p:nvPr/>
-        </p:nvSpPr>
-        <p:spPr>
-          <a:xfrm xmlns:a="http://schemas.openxmlformats.org/drawingml/2006/main">
-            <a:off x="1000125" y="2990850"/>
-            <a:ext cx="476250" cy="476250"/>
-          </a:xfrm>
-          <a:prstGeom xmlns:a="http://schemas.openxmlformats.org/drawingml/2006/main" prst="ellipse">
+                <a16:creationId xmlns:a16="http://schemas.microsoft.com/office/drawing/2014/main" id="{59DB2FD2-C0E7-423E-B86E-3DC1829FF250}"/>
+              </a:ext>
+            </a:extLst>
+          </p:cNvPr>
+          <p:cNvSpPr>
+            <a:spLocks xmlns:a="http://schemas.openxmlformats.org/drawingml/2006/main" noGrp="1"/>
+          </p:cNvSpPr>
+          <p:nvPr/>
+        </p:nvSpPr>
+        <p:spPr>
+          <a:xfrm xmlns:a="http://schemas.openxmlformats.org/drawingml/2006/main">
+            <a:off x="1714500" y="2771775"/>
+            <a:ext cx="9334500" cy="9525"/>
+          </a:xfrm>
+          <a:prstGeom xmlns:a="http://schemas.openxmlformats.org/drawingml/2006/main" prst="rect">
             <a:avLst/>
           </a:prstGeom>
           <a:solidFill xmlns:a="http://schemas.openxmlformats.org/drawingml/2006/main">
-            <a:srgbClr val="2C6E73"/>
+            <a:srgbClr val="D9E0E6"/>
           </a:solidFill>
           <a:ln xmlns:a="http://schemas.openxmlformats.org/drawingml/2006/main" w="0">
-            <a:noFill/>
+            <a:solidFill>
+              <a:srgbClr val="D9E0E6"/>
+            </a:solidFill>
           </a:ln>
         </p:spPr>
       </p:sp>
@@ -8441,19 +8445,19 @@
           <p:cNvPr id="15" name="">
             <a:extLst xmlns:a="http://schemas.openxmlformats.org/drawingml/2006/main">
               <a:ext uri="{FF2B5EF4-FFF2-40B4-BE49-F238E27FC236}">
-                <a16:creationId xmlns:a16="http://schemas.microsoft.com/office/drawing/2014/main" id="{29B0AE4F-89EF-48C4-934B-DDDBE8372A56}"/>
-              </a:ext>
-            </a:extLst>
-          </p:cNvPr>
-          <p:cNvSpPr>
-            <a:spLocks xmlns:a="http://schemas.openxmlformats.org/drawingml/2006/main" noGrp="1"/>
-          </p:cNvSpPr>
-          <p:nvPr/>
-        </p:nvSpPr>
-        <p:spPr>
-          <a:xfrm xmlns:a="http://schemas.openxmlformats.org/drawingml/2006/main">
-            <a:off x="1000125" y="3019425"/>
-            <a:ext cx="476250" cy="419100"/>
+                <a16:creationId xmlns:a16="http://schemas.microsoft.com/office/drawing/2014/main" id="{87D996F5-3638-4954-94FF-93A4FE25381F}"/>
+              </a:ext>
+            </a:extLst>
+          </p:cNvPr>
+          <p:cNvSpPr>
+            <a:spLocks xmlns:a="http://schemas.openxmlformats.org/drawingml/2006/main" noGrp="1"/>
+          </p:cNvSpPr>
+          <p:nvPr/>
+        </p:nvSpPr>
+        <p:spPr>
+          <a:xfrm xmlns:a="http://schemas.openxmlformats.org/drawingml/2006/main">
+            <a:off x="1162050" y="2905125"/>
+            <a:ext cx="400050" cy="400050"/>
           </a:xfrm>
           <a:prstGeom xmlns:a="http://schemas.openxmlformats.org/drawingml/2006/main" prst="rect">
             <a:avLst/>
@@ -8470,9 +8474,9 @@
           <a:lstStyle xmlns:a="http://schemas.openxmlformats.org/drawingml/2006/main"/>
           <a:p xmlns:a="http://schemas.openxmlformats.org/drawingml/2006/main">
             <a:pPr algn="ctr">
-              <a:defRPr sz="1350" b="1">
-                <a:solidFill>
-                  <a:srgbClr val="FFFFFF"/>
+              <a:defRPr sz="1125" b="1">
+                <a:solidFill>
+                  <a:srgbClr val="2C6E73"/>
                 </a:solidFill>
                 <a:latin typeface="Arial"/>
                 <a:ea typeface="Arial"/>
@@ -8480,9 +8484,9 @@
               </a:defRPr>
             </a:pPr>
             <a:r>
-              <a:rPr sz="1350" b="1">
-                <a:solidFill>
-                  <a:srgbClr val="FFFFFF"/>
+              <a:rPr sz="1125" b="1">
+                <a:solidFill>
+                  <a:srgbClr val="2C6E73"/>
                 </a:solidFill>
                 <a:latin typeface="Arial"/>
                 <a:ea typeface="Arial"/>
@@ -8498,19 +8502,19 @@
           <p:cNvPr id="16" name="">
             <a:extLst xmlns:a="http://schemas.openxmlformats.org/drawingml/2006/main">
               <a:ext uri="{FF2B5EF4-FFF2-40B4-BE49-F238E27FC236}">
-                <a16:creationId xmlns:a16="http://schemas.microsoft.com/office/drawing/2014/main" id="{AA53BD3D-3EEF-4059-B7C2-B4F37F38C126}"/>
-              </a:ext>
-            </a:extLst>
-          </p:cNvPr>
-          <p:cNvSpPr>
-            <a:spLocks xmlns:a="http://schemas.openxmlformats.org/drawingml/2006/main" noGrp="1"/>
-          </p:cNvSpPr>
-          <p:nvPr/>
-        </p:nvSpPr>
-        <p:spPr>
-          <a:xfrm xmlns:a="http://schemas.openxmlformats.org/drawingml/2006/main">
-            <a:off x="1714500" y="2924175"/>
-            <a:ext cx="9429750" cy="609600"/>
+                <a16:creationId xmlns:a16="http://schemas.microsoft.com/office/drawing/2014/main" id="{CC105D7B-05F8-43EF-ACBD-BC5FAADB88D4}"/>
+              </a:ext>
+            </a:extLst>
+          </p:cNvPr>
+          <p:cNvSpPr>
+            <a:spLocks xmlns:a="http://schemas.openxmlformats.org/drawingml/2006/main" noGrp="1"/>
+          </p:cNvSpPr>
+          <p:nvPr/>
+        </p:nvSpPr>
+        <p:spPr>
+          <a:xfrm xmlns:a="http://schemas.openxmlformats.org/drawingml/2006/main">
+            <a:off x="1714500" y="2819400"/>
+            <a:ext cx="9525000" cy="638175"/>
           </a:xfrm>
           <a:prstGeom xmlns:a="http://schemas.openxmlformats.org/drawingml/2006/main" prst="rect">
             <a:avLst/>
@@ -8527,7 +8531,7 @@
           <a:lstStyle xmlns:a="http://schemas.openxmlformats.org/drawingml/2006/main"/>
           <a:p xmlns:a="http://schemas.openxmlformats.org/drawingml/2006/main">
             <a:pPr algn="l">
-              <a:defRPr sz="1500" b="0">
+              <a:defRPr sz="1575" b="0">
                 <a:solidFill>
                   <a:srgbClr val="17253A"/>
                 </a:solidFill>
@@ -8537,7 +8541,7 @@
               </a:defRPr>
             </a:pPr>
             <a:r>
-              <a:rPr sz="1500" b="0">
+              <a:rPr sz="1575" b="0">
                 <a:solidFill>
                   <a:srgbClr val="17253A"/>
                 </a:solidFill>
@@ -8545,7 +8549,7 @@
                 <a:ea typeface="Arial"/>
                 <a:cs typeface="Arial"/>
               </a:rPr>
-              <a:t>Set up the method: Calculate using the chosen mental or written method.</a:t>
+              <a:t>28 ÷ 8 = 3 remainder 4</a:t>
             </a:r>
           </a:p>
         </p:txBody>
@@ -8555,28 +8559,30 @@
           <p:cNvPr id="17" name="">
             <a:extLst xmlns:a="http://schemas.openxmlformats.org/drawingml/2006/main">
               <a:ext uri="{FF2B5EF4-FFF2-40B4-BE49-F238E27FC236}">
-                <a16:creationId xmlns:a16="http://schemas.microsoft.com/office/drawing/2014/main" id="{4E0FF525-DE49-4EEA-B0AE-5663570C5658}"/>
-              </a:ext>
-            </a:extLst>
-          </p:cNvPr>
-          <p:cNvSpPr>
-            <a:spLocks xmlns:a="http://schemas.openxmlformats.org/drawingml/2006/main" noGrp="1"/>
-          </p:cNvSpPr>
-          <p:nvPr/>
-        </p:nvSpPr>
-        <p:spPr>
-          <a:xfrm xmlns:a="http://schemas.openxmlformats.org/drawingml/2006/main">
-            <a:off x="1000125" y="3733800"/>
-            <a:ext cx="476250" cy="476250"/>
-          </a:xfrm>
-          <a:prstGeom xmlns:a="http://schemas.openxmlformats.org/drawingml/2006/main" prst="ellipse">
+                <a16:creationId xmlns:a16="http://schemas.microsoft.com/office/drawing/2014/main" id="{9566FDC4-DA52-4727-9534-DCAE0E1BBAD9}"/>
+              </a:ext>
+            </a:extLst>
+          </p:cNvPr>
+          <p:cNvSpPr>
+            <a:spLocks xmlns:a="http://schemas.openxmlformats.org/drawingml/2006/main" noGrp="1"/>
+          </p:cNvSpPr>
+          <p:nvPr/>
+        </p:nvSpPr>
+        <p:spPr>
+          <a:xfrm xmlns:a="http://schemas.openxmlformats.org/drawingml/2006/main">
+            <a:off x="1714500" y="3476625"/>
+            <a:ext cx="9334500" cy="9525"/>
+          </a:xfrm>
+          <a:prstGeom xmlns:a="http://schemas.openxmlformats.org/drawingml/2006/main" prst="rect">
             <a:avLst/>
           </a:prstGeom>
           <a:solidFill xmlns:a="http://schemas.openxmlformats.org/drawingml/2006/main">
-            <a:srgbClr val="2C6E73"/>
+            <a:srgbClr val="D9E0E6"/>
           </a:solidFill>
           <a:ln xmlns:a="http://schemas.openxmlformats.org/drawingml/2006/main" w="0">
-            <a:noFill/>
+            <a:solidFill>
+              <a:srgbClr val="D9E0E6"/>
+            </a:solidFill>
           </a:ln>
         </p:spPr>
       </p:sp>
@@ -8585,19 +8591,19 @@
           <p:cNvPr id="18" name="">
             <a:extLst xmlns:a="http://schemas.openxmlformats.org/drawingml/2006/main">
               <a:ext uri="{FF2B5EF4-FFF2-40B4-BE49-F238E27FC236}">
-                <a16:creationId xmlns:a16="http://schemas.microsoft.com/office/drawing/2014/main" id="{0A98319E-BA88-4DA2-A321-34CA7F3B4F22}"/>
-              </a:ext>
-            </a:extLst>
-          </p:cNvPr>
-          <p:cNvSpPr>
-            <a:spLocks xmlns:a="http://schemas.openxmlformats.org/drawingml/2006/main" noGrp="1"/>
-          </p:cNvSpPr>
-          <p:nvPr/>
-        </p:nvSpPr>
-        <p:spPr>
-          <a:xfrm xmlns:a="http://schemas.openxmlformats.org/drawingml/2006/main">
-            <a:off x="1000125" y="3762375"/>
-            <a:ext cx="476250" cy="419100"/>
+                <a16:creationId xmlns:a16="http://schemas.microsoft.com/office/drawing/2014/main" id="{07AF62BD-AB13-45A5-BEC3-F51D4104A435}"/>
+              </a:ext>
+            </a:extLst>
+          </p:cNvPr>
+          <p:cNvSpPr>
+            <a:spLocks xmlns:a="http://schemas.openxmlformats.org/drawingml/2006/main" noGrp="1"/>
+          </p:cNvSpPr>
+          <p:nvPr/>
+        </p:nvSpPr>
+        <p:spPr>
+          <a:xfrm xmlns:a="http://schemas.openxmlformats.org/drawingml/2006/main">
+            <a:off x="1162050" y="3609975"/>
+            <a:ext cx="400050" cy="400050"/>
           </a:xfrm>
           <a:prstGeom xmlns:a="http://schemas.openxmlformats.org/drawingml/2006/main" prst="rect">
             <a:avLst/>
@@ -8614,9 +8620,9 @@
           <a:lstStyle xmlns:a="http://schemas.openxmlformats.org/drawingml/2006/main"/>
           <a:p xmlns:a="http://schemas.openxmlformats.org/drawingml/2006/main">
             <a:pPr algn="ctr">
-              <a:defRPr sz="1350" b="1">
-                <a:solidFill>
-                  <a:srgbClr val="FFFFFF"/>
+              <a:defRPr sz="1125" b="1">
+                <a:solidFill>
+                  <a:srgbClr val="2C6E73"/>
                 </a:solidFill>
                 <a:latin typeface="Arial"/>
                 <a:ea typeface="Arial"/>
@@ -8624,9 +8630,9 @@
               </a:defRPr>
             </a:pPr>
             <a:r>
-              <a:rPr sz="1350" b="1">
-                <a:solidFill>
-                  <a:srgbClr val="FFFFFF"/>
+              <a:rPr sz="1125" b="1">
+                <a:solidFill>
+                  <a:srgbClr val="2C6E73"/>
                 </a:solidFill>
                 <a:latin typeface="Arial"/>
                 <a:ea typeface="Arial"/>
@@ -8642,19 +8648,19 @@
           <p:cNvPr id="19" name="">
             <a:extLst xmlns:a="http://schemas.openxmlformats.org/drawingml/2006/main">
               <a:ext uri="{FF2B5EF4-FFF2-40B4-BE49-F238E27FC236}">
-                <a16:creationId xmlns:a16="http://schemas.microsoft.com/office/drawing/2014/main" id="{1F5903B5-0E7A-468F-BAFD-D8DE7299955A}"/>
-              </a:ext>
-            </a:extLst>
-          </p:cNvPr>
-          <p:cNvSpPr>
-            <a:spLocks xmlns:a="http://schemas.openxmlformats.org/drawingml/2006/main" noGrp="1"/>
-          </p:cNvSpPr>
-          <p:nvPr/>
-        </p:nvSpPr>
-        <p:spPr>
-          <a:xfrm xmlns:a="http://schemas.openxmlformats.org/drawingml/2006/main">
-            <a:off x="1714500" y="3667125"/>
-            <a:ext cx="9429750" cy="609600"/>
+                <a16:creationId xmlns:a16="http://schemas.microsoft.com/office/drawing/2014/main" id="{6182563D-0F95-42E6-BBF5-4C6A4D8FADE8}"/>
+              </a:ext>
+            </a:extLst>
+          </p:cNvPr>
+          <p:cNvSpPr>
+            <a:spLocks xmlns:a="http://schemas.openxmlformats.org/drawingml/2006/main" noGrp="1"/>
+          </p:cNvSpPr>
+          <p:nvPr/>
+        </p:nvSpPr>
+        <p:spPr>
+          <a:xfrm xmlns:a="http://schemas.openxmlformats.org/drawingml/2006/main">
+            <a:off x="1714500" y="3524250"/>
+            <a:ext cx="9525000" cy="638175"/>
           </a:xfrm>
           <a:prstGeom xmlns:a="http://schemas.openxmlformats.org/drawingml/2006/main" prst="rect">
             <a:avLst/>
@@ -8671,7 +8677,7 @@
           <a:lstStyle xmlns:a="http://schemas.openxmlformats.org/drawingml/2006/main"/>
           <a:p xmlns:a="http://schemas.openxmlformats.org/drawingml/2006/main">
             <a:pPr algn="l">
-              <a:defRPr sz="1500" b="0">
+              <a:defRPr sz="1575" b="0">
                 <a:solidFill>
                   <a:srgbClr val="17253A"/>
                 </a:solidFill>
@@ -8681,7 +8687,7 @@
               </a:defRPr>
             </a:pPr>
             <a:r>
-              <a:rPr sz="1500" b="0">
+              <a:rPr sz="1575" b="0">
                 <a:solidFill>
                   <a:srgbClr val="17253A"/>
                 </a:solidFill>
@@ -8689,7 +8695,7 @@
                 <a:ea typeface="Arial"/>
                 <a:cs typeface="Arial"/>
               </a:rPr>
-              <a:t>Complete the calculation: 3.57.</a:t>
+              <a:t>45 tenths ÷ 8 = 5 tenths remainder 5 tenths</a:t>
             </a:r>
           </a:p>
         </p:txBody>
@@ -8699,28 +8705,30 @@
           <p:cNvPr id="20" name="">
             <a:extLst xmlns:a="http://schemas.openxmlformats.org/drawingml/2006/main">
               <a:ext uri="{FF2B5EF4-FFF2-40B4-BE49-F238E27FC236}">
-                <a16:creationId xmlns:a16="http://schemas.microsoft.com/office/drawing/2014/main" id="{221B9470-A342-4F77-8825-8203FAABF039}"/>
-              </a:ext>
-            </a:extLst>
-          </p:cNvPr>
-          <p:cNvSpPr>
-            <a:spLocks xmlns:a="http://schemas.openxmlformats.org/drawingml/2006/main" noGrp="1"/>
-          </p:cNvSpPr>
-          <p:nvPr/>
-        </p:nvSpPr>
-        <p:spPr>
-          <a:xfrm xmlns:a="http://schemas.openxmlformats.org/drawingml/2006/main">
-            <a:off x="1000125" y="4476750"/>
-            <a:ext cx="476250" cy="476250"/>
-          </a:xfrm>
-          <a:prstGeom xmlns:a="http://schemas.openxmlformats.org/drawingml/2006/main" prst="ellipse">
+                <a16:creationId xmlns:a16="http://schemas.microsoft.com/office/drawing/2014/main" id="{CD9D8109-8E02-4581-97E6-58B572C57CF6}"/>
+              </a:ext>
+            </a:extLst>
+          </p:cNvPr>
+          <p:cNvSpPr>
+            <a:spLocks xmlns:a="http://schemas.openxmlformats.org/drawingml/2006/main" noGrp="1"/>
+          </p:cNvSpPr>
+          <p:nvPr/>
+        </p:nvSpPr>
+        <p:spPr>
+          <a:xfrm xmlns:a="http://schemas.openxmlformats.org/drawingml/2006/main">
+            <a:off x="1714500" y="4181475"/>
+            <a:ext cx="9334500" cy="9525"/>
+          </a:xfrm>
+          <a:prstGeom xmlns:a="http://schemas.openxmlformats.org/drawingml/2006/main" prst="rect">
             <a:avLst/>
           </a:prstGeom>
           <a:solidFill xmlns:a="http://schemas.openxmlformats.org/drawingml/2006/main">
-            <a:srgbClr val="2C6E73"/>
+            <a:srgbClr val="D9E0E6"/>
           </a:solidFill>
           <a:ln xmlns:a="http://schemas.openxmlformats.org/drawingml/2006/main" w="0">
-            <a:noFill/>
+            <a:solidFill>
+              <a:srgbClr val="D9E0E6"/>
+            </a:solidFill>
           </a:ln>
         </p:spPr>
       </p:sp>
@@ -8729,19 +8737,19 @@
           <p:cNvPr id="21" name="">
             <a:extLst xmlns:a="http://schemas.openxmlformats.org/drawingml/2006/main">
               <a:ext uri="{FF2B5EF4-FFF2-40B4-BE49-F238E27FC236}">
-                <a16:creationId xmlns:a16="http://schemas.microsoft.com/office/drawing/2014/main" id="{8EB8871A-3A19-44B8-977A-77FD67366047}"/>
-              </a:ext>
-            </a:extLst>
-          </p:cNvPr>
-          <p:cNvSpPr>
-            <a:spLocks xmlns:a="http://schemas.openxmlformats.org/drawingml/2006/main" noGrp="1"/>
-          </p:cNvSpPr>
-          <p:nvPr/>
-        </p:nvSpPr>
-        <p:spPr>
-          <a:xfrm xmlns:a="http://schemas.openxmlformats.org/drawingml/2006/main">
-            <a:off x="1000125" y="4505325"/>
-            <a:ext cx="476250" cy="419100"/>
+                <a16:creationId xmlns:a16="http://schemas.microsoft.com/office/drawing/2014/main" id="{FADA2661-9589-45E9-BEDC-F372D79B735D}"/>
+              </a:ext>
+            </a:extLst>
+          </p:cNvPr>
+          <p:cNvSpPr>
+            <a:spLocks xmlns:a="http://schemas.openxmlformats.org/drawingml/2006/main" noGrp="1"/>
+          </p:cNvSpPr>
+          <p:nvPr/>
+        </p:nvSpPr>
+        <p:spPr>
+          <a:xfrm xmlns:a="http://schemas.openxmlformats.org/drawingml/2006/main">
+            <a:off x="1162050" y="4314825"/>
+            <a:ext cx="400050" cy="400050"/>
           </a:xfrm>
           <a:prstGeom xmlns:a="http://schemas.openxmlformats.org/drawingml/2006/main" prst="rect">
             <a:avLst/>
@@ -8758,9 +8766,9 @@
           <a:lstStyle xmlns:a="http://schemas.openxmlformats.org/drawingml/2006/main"/>
           <a:p xmlns:a="http://schemas.openxmlformats.org/drawingml/2006/main">
             <a:pPr algn="ctr">
-              <a:defRPr sz="1350" b="1">
-                <a:solidFill>
-                  <a:srgbClr val="FFFFFF"/>
+              <a:defRPr sz="1125" b="1">
+                <a:solidFill>
+                  <a:srgbClr val="2C6E73"/>
                 </a:solidFill>
                 <a:latin typeface="Arial"/>
                 <a:ea typeface="Arial"/>
@@ -8768,9 +8776,9 @@
               </a:defRPr>
             </a:pPr>
             <a:r>
-              <a:rPr sz="1350" b="1">
-                <a:solidFill>
-                  <a:srgbClr val="FFFFFF"/>
+              <a:rPr sz="1125" b="1">
+                <a:solidFill>
+                  <a:srgbClr val="2C6E73"/>
                 </a:solidFill>
                 <a:latin typeface="Arial"/>
                 <a:ea typeface="Arial"/>
@@ -8786,19 +8794,19 @@
           <p:cNvPr id="22" name="">
             <a:extLst xmlns:a="http://schemas.openxmlformats.org/drawingml/2006/main">
               <a:ext uri="{FF2B5EF4-FFF2-40B4-BE49-F238E27FC236}">
-                <a16:creationId xmlns:a16="http://schemas.microsoft.com/office/drawing/2014/main" id="{91219701-9B6A-484B-A363-247A7D58FE1C}"/>
-              </a:ext>
-            </a:extLst>
-          </p:cNvPr>
-          <p:cNvSpPr>
-            <a:spLocks xmlns:a="http://schemas.openxmlformats.org/drawingml/2006/main" noGrp="1"/>
-          </p:cNvSpPr>
-          <p:nvPr/>
-        </p:nvSpPr>
-        <p:spPr>
-          <a:xfrm xmlns:a="http://schemas.openxmlformats.org/drawingml/2006/main">
-            <a:off x="1714500" y="4410075"/>
-            <a:ext cx="9429750" cy="609600"/>
+                <a16:creationId xmlns:a16="http://schemas.microsoft.com/office/drawing/2014/main" id="{2F68F7BD-3BFE-4610-8B4C-4650BDD5F96E}"/>
+              </a:ext>
+            </a:extLst>
+          </p:cNvPr>
+          <p:cNvSpPr>
+            <a:spLocks xmlns:a="http://schemas.openxmlformats.org/drawingml/2006/main" noGrp="1"/>
+          </p:cNvSpPr>
+          <p:nvPr/>
+        </p:nvSpPr>
+        <p:spPr>
+          <a:xfrm xmlns:a="http://schemas.openxmlformats.org/drawingml/2006/main">
+            <a:off x="1714500" y="4229100"/>
+            <a:ext cx="9525000" cy="638175"/>
           </a:xfrm>
           <a:prstGeom xmlns:a="http://schemas.openxmlformats.org/drawingml/2006/main" prst="rect">
             <a:avLst/>
@@ -8815,9 +8823,9 @@
           <a:lstStyle xmlns:a="http://schemas.openxmlformats.org/drawingml/2006/main"/>
           <a:p xmlns:a="http://schemas.openxmlformats.org/drawingml/2006/main">
             <a:pPr algn="l">
-              <a:defRPr sz="1500" b="1">
-                <a:solidFill>
-                  <a:srgbClr val="2F785D"/>
+              <a:defRPr sz="1575" b="0">
+                <a:solidFill>
+                  <a:srgbClr val="17253A"/>
                 </a:solidFill>
                 <a:latin typeface="Arial"/>
                 <a:ea typeface="Arial"/>
@@ -8825,15 +8833,161 @@
               </a:defRPr>
             </a:pPr>
             <a:r>
-              <a:rPr sz="1500" b="1">
+              <a:rPr sz="1575" b="0">
+                <a:solidFill>
+                  <a:srgbClr val="17253A"/>
+                </a:solidFill>
+                <a:latin typeface="Arial"/>
+                <a:ea typeface="Arial"/>
+                <a:cs typeface="Arial"/>
+              </a:rPr>
+              <a:t>56 hundredths ÷ 8 = 7 hundredths</a:t>
+            </a:r>
+          </a:p>
+        </p:txBody>
+      </p:sp>
+      <p:sp>
+        <p:nvSpPr>
+          <p:cNvPr id="23" name="">
+            <a:extLst xmlns:a="http://schemas.openxmlformats.org/drawingml/2006/main">
+              <a:ext uri="{FF2B5EF4-FFF2-40B4-BE49-F238E27FC236}">
+                <a16:creationId xmlns:a16="http://schemas.microsoft.com/office/drawing/2014/main" id="{90F15A8D-D769-474B-A468-B71FC44150C6}"/>
+              </a:ext>
+            </a:extLst>
+          </p:cNvPr>
+          <p:cNvSpPr>
+            <a:spLocks xmlns:a="http://schemas.openxmlformats.org/drawingml/2006/main" noGrp="1"/>
+          </p:cNvSpPr>
+          <p:nvPr/>
+        </p:nvSpPr>
+        <p:spPr>
+          <a:xfrm xmlns:a="http://schemas.openxmlformats.org/drawingml/2006/main">
+            <a:off x="1714500" y="4886325"/>
+            <a:ext cx="9334500" cy="9525"/>
+          </a:xfrm>
+          <a:prstGeom xmlns:a="http://schemas.openxmlformats.org/drawingml/2006/main" prst="rect">
+            <a:avLst/>
+          </a:prstGeom>
+          <a:solidFill xmlns:a="http://schemas.openxmlformats.org/drawingml/2006/main">
+            <a:srgbClr val="D9E0E6"/>
+          </a:solidFill>
+          <a:ln xmlns:a="http://schemas.openxmlformats.org/drawingml/2006/main" w="0">
+            <a:solidFill>
+              <a:srgbClr val="D9E0E6"/>
+            </a:solidFill>
+          </a:ln>
+        </p:spPr>
+      </p:sp>
+      <p:sp>
+        <p:nvSpPr>
+          <p:cNvPr id="24" name="">
+            <a:extLst xmlns:a="http://schemas.openxmlformats.org/drawingml/2006/main">
+              <a:ext uri="{FF2B5EF4-FFF2-40B4-BE49-F238E27FC236}">
+                <a16:creationId xmlns:a16="http://schemas.microsoft.com/office/drawing/2014/main" id="{47060ED6-D660-4652-8656-7FB0591C0EB6}"/>
+              </a:ext>
+            </a:extLst>
+          </p:cNvPr>
+          <p:cNvSpPr>
+            <a:spLocks xmlns:a="http://schemas.openxmlformats.org/drawingml/2006/main" noGrp="1"/>
+          </p:cNvSpPr>
+          <p:nvPr/>
+        </p:nvSpPr>
+        <p:spPr>
+          <a:xfrm xmlns:a="http://schemas.openxmlformats.org/drawingml/2006/main">
+            <a:off x="1162050" y="5019675"/>
+            <a:ext cx="400050" cy="400050"/>
+          </a:xfrm>
+          <a:prstGeom xmlns:a="http://schemas.openxmlformats.org/drawingml/2006/main" prst="rect">
+            <a:avLst/>
+          </a:prstGeom>
+          <a:noFill xmlns:a="http://schemas.openxmlformats.org/drawingml/2006/main"/>
+          <a:ln xmlns:a="http://schemas.openxmlformats.org/drawingml/2006/main" w="0">
+            <a:noFill/>
+          </a:ln>
+        </p:spPr>
+        <p:txBody>
+          <a:bodyPr xmlns:a="http://schemas.openxmlformats.org/drawingml/2006/main" anchor="ctr">
+            <a:normAutofit fontScale="100000"/>
+          </a:bodyPr>
+          <a:lstStyle xmlns:a="http://schemas.openxmlformats.org/drawingml/2006/main"/>
+          <a:p xmlns:a="http://schemas.openxmlformats.org/drawingml/2006/main">
+            <a:pPr algn="ctr">
+              <a:defRPr sz="1125" b="1">
                 <a:solidFill>
                   <a:srgbClr val="2F785D"/>
                 </a:solidFill>
                 <a:latin typeface="Arial"/>
                 <a:ea typeface="Arial"/>
                 <a:cs typeface="Arial"/>
+              </a:defRPr>
+            </a:pPr>
+            <a:r>
+              <a:rPr sz="1125" b="1">
+                <a:solidFill>
+                  <a:srgbClr val="2F785D"/>
+                </a:solidFill>
+                <a:latin typeface="Arial"/>
+                <a:ea typeface="Arial"/>
+                <a:cs typeface="Arial"/>
               </a:rPr>
-              <a:t>Check the result: Estimate and check that the decimal point is reasonable.</a:t>
+              <a:t>5</a:t>
+            </a:r>
+          </a:p>
+        </p:txBody>
+      </p:sp>
+      <p:sp>
+        <p:nvSpPr>
+          <p:cNvPr id="25" name="">
+            <a:extLst xmlns:a="http://schemas.openxmlformats.org/drawingml/2006/main">
+              <a:ext uri="{FF2B5EF4-FFF2-40B4-BE49-F238E27FC236}">
+                <a16:creationId xmlns:a16="http://schemas.microsoft.com/office/drawing/2014/main" id="{4070BB14-DBCD-4550-9C85-775177BC6AC3}"/>
+              </a:ext>
+            </a:extLst>
+          </p:cNvPr>
+          <p:cNvSpPr>
+            <a:spLocks xmlns:a="http://schemas.openxmlformats.org/drawingml/2006/main" noGrp="1"/>
+          </p:cNvSpPr>
+          <p:nvPr/>
+        </p:nvSpPr>
+        <p:spPr>
+          <a:xfrm xmlns:a="http://schemas.openxmlformats.org/drawingml/2006/main">
+            <a:off x="1714500" y="4933950"/>
+            <a:ext cx="9525000" cy="638175"/>
+          </a:xfrm>
+          <a:prstGeom xmlns:a="http://schemas.openxmlformats.org/drawingml/2006/main" prst="rect">
+            <a:avLst/>
+          </a:prstGeom>
+          <a:noFill xmlns:a="http://schemas.openxmlformats.org/drawingml/2006/main"/>
+          <a:ln xmlns:a="http://schemas.openxmlformats.org/drawingml/2006/main" w="0">
+            <a:noFill/>
+          </a:ln>
+        </p:spPr>
+        <p:txBody>
+          <a:bodyPr xmlns:a="http://schemas.openxmlformats.org/drawingml/2006/main" anchor="ctr">
+            <a:normAutofit fontScale="100000"/>
+          </a:bodyPr>
+          <a:lstStyle xmlns:a="http://schemas.openxmlformats.org/drawingml/2006/main"/>
+          <a:p xmlns:a="http://schemas.openxmlformats.org/drawingml/2006/main">
+            <a:pPr algn="l">
+              <a:defRPr sz="1575" b="1">
+                <a:solidFill>
+                  <a:srgbClr val="2F785D"/>
+                </a:solidFill>
+                <a:latin typeface="Arial"/>
+                <a:ea typeface="Arial"/>
+                <a:cs typeface="Arial"/>
+              </a:defRPr>
+            </a:pPr>
+            <a:r>
+              <a:rPr sz="1575" b="1">
+                <a:solidFill>
+                  <a:srgbClr val="2F785D"/>
+                </a:solidFill>
+                <a:latin typeface="Arial"/>
+                <a:ea typeface="Arial"/>
+                <a:cs typeface="Arial"/>
+              </a:rPr>
+              <a:t>3.57</a:t>
             </a:r>
           </a:p>
         </p:txBody>
@@ -8841,7 +8995,7 @@
     </p:spTree>
     <p:extLst>
       <p:ext uri="{BB962C8B-B14F-4D97-AF65-F5344CB8AC3E}">
-        <p14:creationId xmlns:p14="http://schemas.microsoft.com/office/powerpoint/2010/main" val="198198692"/>
+        <p14:creationId xmlns:p14="http://schemas.microsoft.com/office/powerpoint/2010/main" val="1662284267"/>
       </p:ext>
     </p:extLst>
   </p:cSld>
@@ -9078,6 +9232,51 @@
                       </p:childTnLst>
                     </p:cTn>
                   </p:par>
+                  <p:par>
+                    <p:cTn id="23" fill="hold">
+                      <p:stCondLst>
+                        <p:cond delay="indefinite"/>
+                      </p:stCondLst>
+                      <p:childTnLst>
+                        <p:par>
+                          <p:cTn id="24" fill="hold">
+                            <p:stCondLst>
+                              <p:cond delay="0"/>
+                            </p:stCondLst>
+                            <p:childTnLst>
+                              <p:par>
+                                <p:cTn id="25" presetID="1" presetClass="entr" presetSubtype="0" fill="hold" grpId="0" nodeType="clickEffect">
+                                  <p:stCondLst>
+                                    <p:cond delay="0"/>
+                                  </p:stCondLst>
+                                  <p:childTnLst>
+                                    <p:set>
+                                      <p:cBhvr>
+                                        <p:cTn id="26" dur="1" fill="hold">
+                                          <p:stCondLst>
+                                            <p:cond delay="0"/>
+                                          </p:stCondLst>
+                                        </p:cTn>
+                                        <p:tgtEl>
+                                          <p:spTgt spid="25"/>
+                                        </p:tgtEl>
+                                        <p:attrNameLst>
+                                          <p:attrName>style.visibility</p:attrName>
+                                        </p:attrNameLst>
+                                      </p:cBhvr>
+                                      <p:to>
+                                        <p:strVal val="visible"/>
+                                      </p:to>
+                                    </p:set>
+                                  </p:childTnLst>
+                                </p:cTn>
+                              </p:par>
+                            </p:childTnLst>
+                          </p:cTn>
+                        </p:par>
+                      </p:childTnLst>
+                    </p:cTn>
+                  </p:par>
                 </p:childTnLst>
               </p:cTn>
               <p:prevCondLst>
@@ -9105,6 +9304,7 @@
       <p:bldP spid="16" grpId="0"/>
       <p:bldP spid="19" grpId="0"/>
       <p:bldP spid="22" grpId="0"/>
+      <p:bldP spid="25" grpId="0"/>
     </p:bldLst>
   </p:timing>
 </p:sld>
@@ -9134,7 +9334,7 @@
           <p:cNvPr id="15" name="">
             <a:extLst xmlns:a="http://schemas.openxmlformats.org/drawingml/2006/main">
               <a:ext uri="{FF2B5EF4-FFF2-40B4-BE49-F238E27FC236}">
-                <a16:creationId xmlns:a16="http://schemas.microsoft.com/office/drawing/2014/main" id="{5D264CDD-6332-4661-8581-7D1D448350BD}"/>
+                <a16:creationId xmlns:a16="http://schemas.microsoft.com/office/drawing/2014/main" id="{EDC38DFF-2F24-4938-8030-77C533E1314C}"/>
               </a:ext>
             </a:extLst>
           </p:cNvPr>
@@ -9166,7 +9366,7 @@
           <p:cNvPr id="2" name="">
             <a:extLst xmlns:a="http://schemas.openxmlformats.org/drawingml/2006/main">
               <a:ext uri="{FF2B5EF4-FFF2-40B4-BE49-F238E27FC236}">
-                <a16:creationId xmlns:a16="http://schemas.microsoft.com/office/drawing/2014/main" id="{FD0212CF-6D25-4534-AD72-412856A2964C}"/>
+                <a16:creationId xmlns:a16="http://schemas.microsoft.com/office/drawing/2014/main" id="{DEB12E74-DD93-4275-BB9B-7FC11B6C6C68}"/>
               </a:ext>
             </a:extLst>
           </p:cNvPr>
@@ -9223,7 +9423,7 @@
           <p:cNvPr id="3" name="">
             <a:extLst xmlns:a="http://schemas.openxmlformats.org/drawingml/2006/main">
               <a:ext uri="{FF2B5EF4-FFF2-40B4-BE49-F238E27FC236}">
-                <a16:creationId xmlns:a16="http://schemas.microsoft.com/office/drawing/2014/main" id="{0C01AED5-7AD1-4C58-BDE9-22A7B3F76254}"/>
+                <a16:creationId xmlns:a16="http://schemas.microsoft.com/office/drawing/2014/main" id="{67684323-6EE2-44A7-9454-67BEE6722218}"/>
               </a:ext>
             </a:extLst>
           </p:cNvPr>
@@ -9255,7 +9455,7 @@
           <p:cNvPr id="4" name="">
             <a:extLst xmlns:a="http://schemas.openxmlformats.org/drawingml/2006/main">
               <a:ext uri="{FF2B5EF4-FFF2-40B4-BE49-F238E27FC236}">
-                <a16:creationId xmlns:a16="http://schemas.microsoft.com/office/drawing/2014/main" id="{CB00F4B4-150B-4902-BEEA-C241B0B958F9}"/>
+                <a16:creationId xmlns:a16="http://schemas.microsoft.com/office/drawing/2014/main" id="{04CB7D80-EDA6-45CC-A79E-6FC94DFD60BC}"/>
               </a:ext>
             </a:extLst>
           </p:cNvPr>
@@ -9312,7 +9512,7 @@
           <p:cNvPr id="5" name="">
             <a:extLst xmlns:a="http://schemas.openxmlformats.org/drawingml/2006/main">
               <a:ext uri="{FF2B5EF4-FFF2-40B4-BE49-F238E27FC236}">
-                <a16:creationId xmlns:a16="http://schemas.microsoft.com/office/drawing/2014/main" id="{186E66BD-0EEB-4146-8FF6-B2AC86ACEEFF}"/>
+                <a16:creationId xmlns:a16="http://schemas.microsoft.com/office/drawing/2014/main" id="{9CB387A9-DB84-4010-B0B7-D6337EF1BD6D}"/>
               </a:ext>
             </a:extLst>
           </p:cNvPr>
@@ -9369,7 +9569,7 @@
           <p:cNvPr id="6" name="">
             <a:extLst xmlns:a="http://schemas.openxmlformats.org/drawingml/2006/main">
               <a:ext uri="{FF2B5EF4-FFF2-40B4-BE49-F238E27FC236}">
-                <a16:creationId xmlns:a16="http://schemas.microsoft.com/office/drawing/2014/main" id="{CBFD7013-31A8-4587-ACE2-B178057DE37A}"/>
+                <a16:creationId xmlns:a16="http://schemas.microsoft.com/office/drawing/2014/main" id="{D157BCA5-5B24-4194-A635-4B3C7CB3EB8D}"/>
               </a:ext>
             </a:extLst>
           </p:cNvPr>
@@ -9426,7 +9626,7 @@
           <p:cNvPr id="7" name="">
             <a:extLst xmlns:a="http://schemas.openxmlformats.org/drawingml/2006/main">
               <a:ext uri="{FF2B5EF4-FFF2-40B4-BE49-F238E27FC236}">
-                <a16:creationId xmlns:a16="http://schemas.microsoft.com/office/drawing/2014/main" id="{06CCAAE3-76BB-4732-9157-B492D9CD81E1}"/>
+                <a16:creationId xmlns:a16="http://schemas.microsoft.com/office/drawing/2014/main" id="{D0F5400B-4D3D-423B-BF49-33BF50337D52}"/>
               </a:ext>
             </a:extLst>
           </p:cNvPr>
@@ -9458,7 +9658,7 @@
           <p:cNvPr id="8" name="">
             <a:extLst xmlns:a="http://schemas.openxmlformats.org/drawingml/2006/main">
               <a:ext uri="{FF2B5EF4-FFF2-40B4-BE49-F238E27FC236}">
-                <a16:creationId xmlns:a16="http://schemas.microsoft.com/office/drawing/2014/main" id="{C07C50A6-5F75-470D-B097-153628AC71BA}"/>
+                <a16:creationId xmlns:a16="http://schemas.microsoft.com/office/drawing/2014/main" id="{D9269E55-E067-4B2A-B9B2-00379BA48460}"/>
               </a:ext>
             </a:extLst>
           </p:cNvPr>
@@ -9515,7 +9715,7 @@
           <p:cNvPr id="9" name="">
             <a:extLst xmlns:a="http://schemas.openxmlformats.org/drawingml/2006/main">
               <a:ext uri="{FF2B5EF4-FFF2-40B4-BE49-F238E27FC236}">
-                <a16:creationId xmlns:a16="http://schemas.microsoft.com/office/drawing/2014/main" id="{907CDCCA-16B2-4BC0-A912-25064CA798AC}"/>
+                <a16:creationId xmlns:a16="http://schemas.microsoft.com/office/drawing/2014/main" id="{7754C36C-5481-4CFE-A956-5F5CB290B995}"/>
               </a:ext>
             </a:extLst>
           </p:cNvPr>
@@ -9572,7 +9772,7 @@
           <p:cNvPr id="10" name="">
             <a:extLst xmlns:a="http://schemas.openxmlformats.org/drawingml/2006/main">
               <a:ext uri="{FF2B5EF4-FFF2-40B4-BE49-F238E27FC236}">
-                <a16:creationId xmlns:a16="http://schemas.microsoft.com/office/drawing/2014/main" id="{93A4245A-85F4-48BE-B7A4-50D2AAD10434}"/>
+                <a16:creationId xmlns:a16="http://schemas.microsoft.com/office/drawing/2014/main" id="{1E20088B-6459-41D2-9F53-BB189CDC73AB}"/>
               </a:ext>
             </a:extLst>
           </p:cNvPr>
@@ -9629,7 +9829,7 @@
           <p:cNvPr id="11" name="">
             <a:extLst xmlns:a="http://schemas.openxmlformats.org/drawingml/2006/main">
               <a:ext uri="{FF2B5EF4-FFF2-40B4-BE49-F238E27FC236}">
-                <a16:creationId xmlns:a16="http://schemas.microsoft.com/office/drawing/2014/main" id="{F2744CEC-232C-49C3-83F2-CA8A9920634C}"/>
+                <a16:creationId xmlns:a16="http://schemas.microsoft.com/office/drawing/2014/main" id="{5B07EA02-8F76-4BB3-B4B2-13D8DEB7EE5F}"/>
               </a:ext>
             </a:extLst>
           </p:cNvPr>
@@ -9686,7 +9886,7 @@
           <p:cNvPr id="12" name="">
             <a:extLst xmlns:a="http://schemas.openxmlformats.org/drawingml/2006/main">
               <a:ext uri="{FF2B5EF4-FFF2-40B4-BE49-F238E27FC236}">
-                <a16:creationId xmlns:a16="http://schemas.microsoft.com/office/drawing/2014/main" id="{6BF7E269-7D92-4235-AFA6-F78D26F4F4FF}"/>
+                <a16:creationId xmlns:a16="http://schemas.microsoft.com/office/drawing/2014/main" id="{1F5FAF3C-0AD0-4E69-859F-3DE58B6072AE}"/>
               </a:ext>
             </a:extLst>
           </p:cNvPr>
@@ -9718,7 +9918,7 @@
           <p:cNvPr id="13" name="">
             <a:extLst xmlns:a="http://schemas.openxmlformats.org/drawingml/2006/main">
               <a:ext uri="{FF2B5EF4-FFF2-40B4-BE49-F238E27FC236}">
-                <a16:creationId xmlns:a16="http://schemas.microsoft.com/office/drawing/2014/main" id="{FA5BDD31-8F38-459C-A04C-AEADC862AA11}"/>
+                <a16:creationId xmlns:a16="http://schemas.microsoft.com/office/drawing/2014/main" id="{952BF335-A0D0-4B34-BF23-CFB8F5596151}"/>
               </a:ext>
             </a:extLst>
           </p:cNvPr>
@@ -9775,7 +9975,7 @@
           <p:cNvPr id="14" name="">
             <a:extLst xmlns:a="http://schemas.openxmlformats.org/drawingml/2006/main">
               <a:ext uri="{FF2B5EF4-FFF2-40B4-BE49-F238E27FC236}">
-                <a16:creationId xmlns:a16="http://schemas.microsoft.com/office/drawing/2014/main" id="{A0277917-9730-4C19-8DFA-25B6B589DBF5}"/>
+                <a16:creationId xmlns:a16="http://schemas.microsoft.com/office/drawing/2014/main" id="{CFEB40A5-782D-4B22-882C-F6349662D6FA}"/>
               </a:ext>
             </a:extLst>
           </p:cNvPr>
@@ -9830,7 +10030,7 @@
     </p:spTree>
     <p:extLst>
       <p:ext uri="{BB962C8B-B14F-4D97-AF65-F5344CB8AC3E}">
-        <p14:creationId xmlns:p14="http://schemas.microsoft.com/office/powerpoint/2010/main" val="277465152"/>
+        <p14:creationId xmlns:p14="http://schemas.microsoft.com/office/powerpoint/2010/main" val="1744461081"/>
       </p:ext>
     </p:extLst>
   </p:cSld>
@@ -10031,7 +10231,7 @@
           <p:cNvPr id="16" name="">
             <a:extLst xmlns:a="http://schemas.openxmlformats.org/drawingml/2006/main">
               <a:ext uri="{FF2B5EF4-FFF2-40B4-BE49-F238E27FC236}">
-                <a16:creationId xmlns:a16="http://schemas.microsoft.com/office/drawing/2014/main" id="{A05CD5A5-E2E6-415D-82CD-5DA979A23DB7}"/>
+                <a16:creationId xmlns:a16="http://schemas.microsoft.com/office/drawing/2014/main" id="{12979AB9-5985-4125-A432-DDFFDDF3EEA2}"/>
               </a:ext>
             </a:extLst>
           </p:cNvPr>
@@ -10063,7 +10263,7 @@
           <p:cNvPr id="2" name="">
             <a:extLst xmlns:a="http://schemas.openxmlformats.org/drawingml/2006/main">
               <a:ext uri="{FF2B5EF4-FFF2-40B4-BE49-F238E27FC236}">
-                <a16:creationId xmlns:a16="http://schemas.microsoft.com/office/drawing/2014/main" id="{F06F597F-332D-4E95-B338-26000E51A9A7}"/>
+                <a16:creationId xmlns:a16="http://schemas.microsoft.com/office/drawing/2014/main" id="{E02C1009-D69F-414B-9208-73F35F94D306}"/>
               </a:ext>
             </a:extLst>
           </p:cNvPr>
@@ -10120,7 +10320,7 @@
           <p:cNvPr id="3" name="">
             <a:extLst xmlns:a="http://schemas.openxmlformats.org/drawingml/2006/main">
               <a:ext uri="{FF2B5EF4-FFF2-40B4-BE49-F238E27FC236}">
-                <a16:creationId xmlns:a16="http://schemas.microsoft.com/office/drawing/2014/main" id="{6CD66EB8-364D-4B0C-AD85-6A6C572FA061}"/>
+                <a16:creationId xmlns:a16="http://schemas.microsoft.com/office/drawing/2014/main" id="{69A63331-1D89-4625-9DC9-B82B94EC3B88}"/>
               </a:ext>
             </a:extLst>
           </p:cNvPr>
@@ -10152,7 +10352,7 @@
           <p:cNvPr id="4" name="">
             <a:extLst xmlns:a="http://schemas.openxmlformats.org/drawingml/2006/main">
               <a:ext uri="{FF2B5EF4-FFF2-40B4-BE49-F238E27FC236}">
-                <a16:creationId xmlns:a16="http://schemas.microsoft.com/office/drawing/2014/main" id="{879A5CA6-D1B0-43B1-8C95-AA4F1A428E02}"/>
+                <a16:creationId xmlns:a16="http://schemas.microsoft.com/office/drawing/2014/main" id="{0E9DA97D-5E39-42FA-8EB9-0F0C26FA2970}"/>
               </a:ext>
             </a:extLst>
           </p:cNvPr>
@@ -10209,7 +10409,7 @@
           <p:cNvPr id="5" name="">
             <a:extLst xmlns:a="http://schemas.openxmlformats.org/drawingml/2006/main">
               <a:ext uri="{FF2B5EF4-FFF2-40B4-BE49-F238E27FC236}">
-                <a16:creationId xmlns:a16="http://schemas.microsoft.com/office/drawing/2014/main" id="{2B049DDE-19E8-4065-9BE6-63ABE9E3F268}"/>
+                <a16:creationId xmlns:a16="http://schemas.microsoft.com/office/drawing/2014/main" id="{CCA307FE-FA1F-422D-A27C-4AA107814F46}"/>
               </a:ext>
             </a:extLst>
           </p:cNvPr>
@@ -10266,7 +10466,7 @@
           <p:cNvPr id="6" name="">
             <a:extLst xmlns:a="http://schemas.openxmlformats.org/drawingml/2006/main">
               <a:ext uri="{FF2B5EF4-FFF2-40B4-BE49-F238E27FC236}">
-                <a16:creationId xmlns:a16="http://schemas.microsoft.com/office/drawing/2014/main" id="{C99E489C-7E8D-4496-9C0F-62028D9C0F22}"/>
+                <a16:creationId xmlns:a16="http://schemas.microsoft.com/office/drawing/2014/main" id="{59622DD4-11C8-4EBF-937A-C6ECDC38C057}"/>
               </a:ext>
             </a:extLst>
           </p:cNvPr>
@@ -10323,7 +10523,7 @@
           <p:cNvPr id="7" name="">
             <a:extLst xmlns:a="http://schemas.openxmlformats.org/drawingml/2006/main">
               <a:ext uri="{FF2B5EF4-FFF2-40B4-BE49-F238E27FC236}">
-                <a16:creationId xmlns:a16="http://schemas.microsoft.com/office/drawing/2014/main" id="{118A1FF3-31DB-4002-B860-94EA7A398878}"/>
+                <a16:creationId xmlns:a16="http://schemas.microsoft.com/office/drawing/2014/main" id="{1EFDC3C5-257B-470F-85B5-62044C7B683F}"/>
               </a:ext>
             </a:extLst>
           </p:cNvPr>
@@ -10355,7 +10555,7 @@
           <p:cNvPr id="8" name="">
             <a:extLst xmlns:a="http://schemas.openxmlformats.org/drawingml/2006/main">
               <a:ext uri="{FF2B5EF4-FFF2-40B4-BE49-F238E27FC236}">
-                <a16:creationId xmlns:a16="http://schemas.microsoft.com/office/drawing/2014/main" id="{4573DBF7-680F-48EA-BD60-81A46C335B19}"/>
+                <a16:creationId xmlns:a16="http://schemas.microsoft.com/office/drawing/2014/main" id="{DF616C1C-6911-4507-A057-B40D009262C1}"/>
               </a:ext>
             </a:extLst>
           </p:cNvPr>
@@ -10412,7 +10612,7 @@
           <p:cNvPr id="9" name="">
             <a:extLst xmlns:a="http://schemas.openxmlformats.org/drawingml/2006/main">
               <a:ext uri="{FF2B5EF4-FFF2-40B4-BE49-F238E27FC236}">
-                <a16:creationId xmlns:a16="http://schemas.microsoft.com/office/drawing/2014/main" id="{6929F564-B8BD-4BAD-91F8-161BA9A68F00}"/>
+                <a16:creationId xmlns:a16="http://schemas.microsoft.com/office/drawing/2014/main" id="{8006BBF3-DD63-49D9-8891-7519D018A88F}"/>
               </a:ext>
             </a:extLst>
           </p:cNvPr>
@@ -10469,7 +10669,7 @@
           <p:cNvPr id="10" name="">
             <a:extLst xmlns:a="http://schemas.openxmlformats.org/drawingml/2006/main">
               <a:ext uri="{FF2B5EF4-FFF2-40B4-BE49-F238E27FC236}">
-                <a16:creationId xmlns:a16="http://schemas.microsoft.com/office/drawing/2014/main" id="{0571A071-7D3D-4B9E-A0F3-FF45793411A4}"/>
+                <a16:creationId xmlns:a16="http://schemas.microsoft.com/office/drawing/2014/main" id="{312604B5-E489-47D0-BDF8-6BA5945CB73D}"/>
               </a:ext>
             </a:extLst>
           </p:cNvPr>
@@ -10526,7 +10726,7 @@
           <p:cNvPr id="11" name="">
             <a:extLst xmlns:a="http://schemas.openxmlformats.org/drawingml/2006/main">
               <a:ext uri="{FF2B5EF4-FFF2-40B4-BE49-F238E27FC236}">
-                <a16:creationId xmlns:a16="http://schemas.microsoft.com/office/drawing/2014/main" id="{3F52EBD1-25D7-45B2-852A-7DDEDB2B627F}"/>
+                <a16:creationId xmlns:a16="http://schemas.microsoft.com/office/drawing/2014/main" id="{B761354C-FDF2-4DA8-9AF4-CD42546E6711}"/>
               </a:ext>
             </a:extLst>
           </p:cNvPr>
@@ -10583,7 +10783,7 @@
           <p:cNvPr id="12" name="">
             <a:extLst xmlns:a="http://schemas.openxmlformats.org/drawingml/2006/main">
               <a:ext uri="{FF2B5EF4-FFF2-40B4-BE49-F238E27FC236}">
-                <a16:creationId xmlns:a16="http://schemas.microsoft.com/office/drawing/2014/main" id="{A602332F-AD34-4B5A-917D-9C93DA12987C}"/>
+                <a16:creationId xmlns:a16="http://schemas.microsoft.com/office/drawing/2014/main" id="{D5EBC0D6-DF87-4730-9D38-57560742ED7B}"/>
               </a:ext>
             </a:extLst>
           </p:cNvPr>
@@ -10640,7 +10840,7 @@
           <p:cNvPr id="13" name="">
             <a:extLst xmlns:a="http://schemas.openxmlformats.org/drawingml/2006/main">
               <a:ext uri="{FF2B5EF4-FFF2-40B4-BE49-F238E27FC236}">
-                <a16:creationId xmlns:a16="http://schemas.microsoft.com/office/drawing/2014/main" id="{7D965499-E65E-4F90-B031-803B279B18FA}"/>
+                <a16:creationId xmlns:a16="http://schemas.microsoft.com/office/drawing/2014/main" id="{E6B58674-3CD1-4A2F-BF44-21E61AA59A6E}"/>
               </a:ext>
             </a:extLst>
           </p:cNvPr>
@@ -10697,7 +10897,7 @@
           <p:cNvPr id="14" name="">
             <a:extLst xmlns:a="http://schemas.openxmlformats.org/drawingml/2006/main">
               <a:ext uri="{FF2B5EF4-FFF2-40B4-BE49-F238E27FC236}">
-                <a16:creationId xmlns:a16="http://schemas.microsoft.com/office/drawing/2014/main" id="{B88FF5C7-7000-490F-816E-26F15C23C55D}"/>
+                <a16:creationId xmlns:a16="http://schemas.microsoft.com/office/drawing/2014/main" id="{CBCE94C8-1BF3-4C9A-BE3D-FCFC87582F2A}"/>
               </a:ext>
             </a:extLst>
           </p:cNvPr>
@@ -10754,7 +10954,7 @@
           <p:cNvPr id="15" name="">
             <a:extLst xmlns:a="http://schemas.openxmlformats.org/drawingml/2006/main">
               <a:ext uri="{FF2B5EF4-FFF2-40B4-BE49-F238E27FC236}">
-                <a16:creationId xmlns:a16="http://schemas.microsoft.com/office/drawing/2014/main" id="{BA77D195-A9D8-4520-A447-930446B1CCD4}"/>
+                <a16:creationId xmlns:a16="http://schemas.microsoft.com/office/drawing/2014/main" id="{65D42C4F-2CF4-4F5C-84F8-A1BA892A08FD}"/>
               </a:ext>
             </a:extLst>
           </p:cNvPr>
@@ -10809,7 +11009,7 @@
     </p:spTree>
     <p:extLst>
       <p:ext uri="{BB962C8B-B14F-4D97-AF65-F5344CB8AC3E}">
-        <p14:creationId xmlns:p14="http://schemas.microsoft.com/office/powerpoint/2010/main" val="565457781"/>
+        <p14:creationId xmlns:p14="http://schemas.microsoft.com/office/powerpoint/2010/main" val="251895831"/>
       </p:ext>
     </p:extLst>
   </p:cSld>
@@ -10964,7 +11164,7 @@
           <p:cNvPr id="16" name="">
             <a:extLst xmlns:a="http://schemas.openxmlformats.org/drawingml/2006/main">
               <a:ext uri="{FF2B5EF4-FFF2-40B4-BE49-F238E27FC236}">
-                <a16:creationId xmlns:a16="http://schemas.microsoft.com/office/drawing/2014/main" id="{8688E2E5-84AC-4EF0-985A-C1576B6E8197}"/>
+                <a16:creationId xmlns:a16="http://schemas.microsoft.com/office/drawing/2014/main" id="{153D8C31-20C4-4BA0-BC2A-5018A1FDE0FF}"/>
               </a:ext>
             </a:extLst>
           </p:cNvPr>
@@ -10996,7 +11196,7 @@
           <p:cNvPr id="2" name="">
             <a:extLst xmlns:a="http://schemas.openxmlformats.org/drawingml/2006/main">
               <a:ext uri="{FF2B5EF4-FFF2-40B4-BE49-F238E27FC236}">
-                <a16:creationId xmlns:a16="http://schemas.microsoft.com/office/drawing/2014/main" id="{909B260C-AEBB-47B5-982D-F0C98B0E7AF7}"/>
+                <a16:creationId xmlns:a16="http://schemas.microsoft.com/office/drawing/2014/main" id="{0F3F00A8-1F69-4343-A3EA-0F92D048BEAA}"/>
               </a:ext>
             </a:extLst>
           </p:cNvPr>
@@ -11053,7 +11253,7 @@
           <p:cNvPr id="3" name="">
             <a:extLst xmlns:a="http://schemas.openxmlformats.org/drawingml/2006/main">
               <a:ext uri="{FF2B5EF4-FFF2-40B4-BE49-F238E27FC236}">
-                <a16:creationId xmlns:a16="http://schemas.microsoft.com/office/drawing/2014/main" id="{CF98F227-0B7F-4124-B13E-88BB2AE940C7}"/>
+                <a16:creationId xmlns:a16="http://schemas.microsoft.com/office/drawing/2014/main" id="{A5902016-8766-46DC-9529-E0C44E5709E9}"/>
               </a:ext>
             </a:extLst>
           </p:cNvPr>
@@ -11085,7 +11285,7 @@
           <p:cNvPr id="4" name="">
             <a:extLst xmlns:a="http://schemas.openxmlformats.org/drawingml/2006/main">
               <a:ext uri="{FF2B5EF4-FFF2-40B4-BE49-F238E27FC236}">
-                <a16:creationId xmlns:a16="http://schemas.microsoft.com/office/drawing/2014/main" id="{66FB7DEC-7A09-4CD6-9FD4-099261F7E697}"/>
+                <a16:creationId xmlns:a16="http://schemas.microsoft.com/office/drawing/2014/main" id="{D44F373B-16F8-4AB3-ACC1-3A56B9D13F0F}"/>
               </a:ext>
             </a:extLst>
           </p:cNvPr>
@@ -11142,7 +11342,7 @@
           <p:cNvPr id="5" name="">
             <a:extLst xmlns:a="http://schemas.openxmlformats.org/drawingml/2006/main">
               <a:ext uri="{FF2B5EF4-FFF2-40B4-BE49-F238E27FC236}">
-                <a16:creationId xmlns:a16="http://schemas.microsoft.com/office/drawing/2014/main" id="{9061A9E6-784E-4444-B911-F3BEBD7C910F}"/>
+                <a16:creationId xmlns:a16="http://schemas.microsoft.com/office/drawing/2014/main" id="{94CAA542-0206-4E3F-9741-207C38841894}"/>
               </a:ext>
             </a:extLst>
           </p:cNvPr>
@@ -11199,7 +11399,7 @@
           <p:cNvPr id="6" name="">
             <a:extLst xmlns:a="http://schemas.openxmlformats.org/drawingml/2006/main">
               <a:ext uri="{FF2B5EF4-FFF2-40B4-BE49-F238E27FC236}">
-                <a16:creationId xmlns:a16="http://schemas.microsoft.com/office/drawing/2014/main" id="{32F639A4-BC77-4963-9F25-A2B3039B9C43}"/>
+                <a16:creationId xmlns:a16="http://schemas.microsoft.com/office/drawing/2014/main" id="{A8ED4EE7-C21F-4D6D-A16E-AC81980C2809}"/>
               </a:ext>
             </a:extLst>
           </p:cNvPr>
@@ -11256,7 +11456,7 @@
           <p:cNvPr id="7" name="">
             <a:extLst xmlns:a="http://schemas.openxmlformats.org/drawingml/2006/main">
               <a:ext uri="{FF2B5EF4-FFF2-40B4-BE49-F238E27FC236}">
-                <a16:creationId xmlns:a16="http://schemas.microsoft.com/office/drawing/2014/main" id="{8C5F50BC-FA6F-406A-A175-0615214536F6}"/>
+                <a16:creationId xmlns:a16="http://schemas.microsoft.com/office/drawing/2014/main" id="{3D113E04-DA57-4922-A18E-7533942F42B0}"/>
               </a:ext>
             </a:extLst>
           </p:cNvPr>
@@ -11288,7 +11488,7 @@
           <p:cNvPr id="8" name="">
             <a:extLst xmlns:a="http://schemas.openxmlformats.org/drawingml/2006/main">
               <a:ext uri="{FF2B5EF4-FFF2-40B4-BE49-F238E27FC236}">
-                <a16:creationId xmlns:a16="http://schemas.microsoft.com/office/drawing/2014/main" id="{8DF380F0-A2B7-459E-9920-04A8FFB1F676}"/>
+                <a16:creationId xmlns:a16="http://schemas.microsoft.com/office/drawing/2014/main" id="{18E925ED-E3DA-4E35-AA45-4E6B3F59C585}"/>
               </a:ext>
             </a:extLst>
           </p:cNvPr>
@@ -11345,7 +11545,7 @@
           <p:cNvPr id="9" name="">
             <a:extLst xmlns:a="http://schemas.openxmlformats.org/drawingml/2006/main">
               <a:ext uri="{FF2B5EF4-FFF2-40B4-BE49-F238E27FC236}">
-                <a16:creationId xmlns:a16="http://schemas.microsoft.com/office/drawing/2014/main" id="{940687A7-0E72-4955-B4D6-2472337ED6C0}"/>
+                <a16:creationId xmlns:a16="http://schemas.microsoft.com/office/drawing/2014/main" id="{E0CF19BA-EA4C-4E63-AFAB-D21FAE602B84}"/>
               </a:ext>
             </a:extLst>
           </p:cNvPr>
@@ -11406,7 +11606,7 @@
           <p:nvPr/>
         </p:nvPicPr>
         <p:blipFill>
-          <a:blip xmlns:r="http://schemas.openxmlformats.org/officeDocument/2006/relationships" xmlns:a="http://schemas.openxmlformats.org/drawingml/2006/main" r:embed="R88d6fef66eea4fcc"/>
+          <a:blip xmlns:r="http://schemas.openxmlformats.org/officeDocument/2006/relationships" xmlns:a="http://schemas.openxmlformats.org/drawingml/2006/main" r:embed="R2faef83c3acb4eb0"/>
           <a:stretch xmlns:a="http://schemas.openxmlformats.org/drawingml/2006/main"/>
         </p:blipFill>
         <p:spPr>
@@ -11424,7 +11624,7 @@
           <p:cNvPr id="11" name="">
             <a:extLst xmlns:a="http://schemas.openxmlformats.org/drawingml/2006/main">
               <a:ext uri="{FF2B5EF4-FFF2-40B4-BE49-F238E27FC236}">
-                <a16:creationId xmlns:a16="http://schemas.microsoft.com/office/drawing/2014/main" id="{E65B0C78-56A1-4EB1-8AE1-9ABDAEFCF25A}"/>
+                <a16:creationId xmlns:a16="http://schemas.microsoft.com/office/drawing/2014/main" id="{A9F57369-16E9-49A3-A6B0-8A7A88DAB6B6}"/>
               </a:ext>
             </a:extLst>
           </p:cNvPr>
@@ -11481,7 +11681,7 @@
           <p:cNvPr id="12" name="">
             <a:extLst xmlns:a="http://schemas.openxmlformats.org/drawingml/2006/main">
               <a:ext uri="{FF2B5EF4-FFF2-40B4-BE49-F238E27FC236}">
-                <a16:creationId xmlns:a16="http://schemas.microsoft.com/office/drawing/2014/main" id="{799E3DFA-7DD1-4435-808E-E9631DBCCFE4}"/>
+                <a16:creationId xmlns:a16="http://schemas.microsoft.com/office/drawing/2014/main" id="{BC1EC80A-FA45-49EF-B083-5D700B07D1EC}"/>
               </a:ext>
             </a:extLst>
           </p:cNvPr>
@@ -11538,7 +11738,7 @@
           <p:cNvPr id="13" name="">
             <a:extLst xmlns:a="http://schemas.openxmlformats.org/drawingml/2006/main">
               <a:ext uri="{FF2B5EF4-FFF2-40B4-BE49-F238E27FC236}">
-                <a16:creationId xmlns:a16="http://schemas.microsoft.com/office/drawing/2014/main" id="{33E49123-7923-4CE4-869D-A47630BC7159}"/>
+                <a16:creationId xmlns:a16="http://schemas.microsoft.com/office/drawing/2014/main" id="{88D43540-7F56-4157-9C28-0393BE014C95}"/>
               </a:ext>
             </a:extLst>
           </p:cNvPr>
@@ -11570,7 +11770,7 @@
           <p:cNvPr id="14" name="">
             <a:extLst xmlns:a="http://schemas.openxmlformats.org/drawingml/2006/main">
               <a:ext uri="{FF2B5EF4-FFF2-40B4-BE49-F238E27FC236}">
-                <a16:creationId xmlns:a16="http://schemas.microsoft.com/office/drawing/2014/main" id="{349A5EDE-E3CB-42B4-86AD-4A1452D51AF7}"/>
+                <a16:creationId xmlns:a16="http://schemas.microsoft.com/office/drawing/2014/main" id="{CE4309DA-924F-4CF2-A4D5-39550D22170C}"/>
               </a:ext>
             </a:extLst>
           </p:cNvPr>
@@ -11627,7 +11827,7 @@
           <p:cNvPr id="15" name="">
             <a:extLst xmlns:a="http://schemas.openxmlformats.org/drawingml/2006/main">
               <a:ext uri="{FF2B5EF4-FFF2-40B4-BE49-F238E27FC236}">
-                <a16:creationId xmlns:a16="http://schemas.microsoft.com/office/drawing/2014/main" id="{FF067FB3-D2B6-455E-9673-16470836C5C9}"/>
+                <a16:creationId xmlns:a16="http://schemas.microsoft.com/office/drawing/2014/main" id="{650C35E4-F55E-4E6C-B2E8-CDE40AC0ED08}"/>
               </a:ext>
             </a:extLst>
           </p:cNvPr>
@@ -11682,7 +11882,7 @@
     </p:spTree>
     <p:extLst>
       <p:ext uri="{BB962C8B-B14F-4D97-AF65-F5344CB8AC3E}">
-        <p14:creationId xmlns:p14="http://schemas.microsoft.com/office/powerpoint/2010/main" val="648363822"/>
+        <p14:creationId xmlns:p14="http://schemas.microsoft.com/office/powerpoint/2010/main" val="1916993588"/>
       </p:ext>
     </p:extLst>
   </p:cSld>
@@ -11837,7 +12037,7 @@
           <p:cNvPr id="23" name="">
             <a:extLst xmlns:a="http://schemas.openxmlformats.org/drawingml/2006/main">
               <a:ext uri="{FF2B5EF4-FFF2-40B4-BE49-F238E27FC236}">
-                <a16:creationId xmlns:a16="http://schemas.microsoft.com/office/drawing/2014/main" id="{CB3D7597-B0FC-4D58-9C62-3437D9153370}"/>
+                <a16:creationId xmlns:a16="http://schemas.microsoft.com/office/drawing/2014/main" id="{AC33FCC3-BC93-42B2-AE0F-F347B134DDF3}"/>
               </a:ext>
             </a:extLst>
           </p:cNvPr>
@@ -11869,7 +12069,7 @@
           <p:cNvPr id="2" name="">
             <a:extLst xmlns:a="http://schemas.openxmlformats.org/drawingml/2006/main">
               <a:ext uri="{FF2B5EF4-FFF2-40B4-BE49-F238E27FC236}">
-                <a16:creationId xmlns:a16="http://schemas.microsoft.com/office/drawing/2014/main" id="{67CE5900-1FC0-45C9-A5E3-F9BE732B4863}"/>
+                <a16:creationId xmlns:a16="http://schemas.microsoft.com/office/drawing/2014/main" id="{60816F5B-7CA8-4671-88E4-5DF28F487C02}"/>
               </a:ext>
             </a:extLst>
           </p:cNvPr>
@@ -11926,7 +12126,7 @@
           <p:cNvPr id="3" name="">
             <a:extLst xmlns:a="http://schemas.openxmlformats.org/drawingml/2006/main">
               <a:ext uri="{FF2B5EF4-FFF2-40B4-BE49-F238E27FC236}">
-                <a16:creationId xmlns:a16="http://schemas.microsoft.com/office/drawing/2014/main" id="{36804658-515A-4BC0-B58E-3982813D4C95}"/>
+                <a16:creationId xmlns:a16="http://schemas.microsoft.com/office/drawing/2014/main" id="{64FACB4D-75E0-4E12-8A3F-433F42072038}"/>
               </a:ext>
             </a:extLst>
           </p:cNvPr>
@@ -11958,7 +12158,7 @@
           <p:cNvPr id="4" name="">
             <a:extLst xmlns:a="http://schemas.openxmlformats.org/drawingml/2006/main">
               <a:ext uri="{FF2B5EF4-FFF2-40B4-BE49-F238E27FC236}">
-                <a16:creationId xmlns:a16="http://schemas.microsoft.com/office/drawing/2014/main" id="{F3B4C5E9-A6FD-410D-B523-A7F101B2F8CE}"/>
+                <a16:creationId xmlns:a16="http://schemas.microsoft.com/office/drawing/2014/main" id="{FAA9D177-880A-4DB2-AF2F-03C3154FE541}"/>
               </a:ext>
             </a:extLst>
           </p:cNvPr>
@@ -12015,7 +12215,7 @@
           <p:cNvPr id="5" name="">
             <a:extLst xmlns:a="http://schemas.openxmlformats.org/drawingml/2006/main">
               <a:ext uri="{FF2B5EF4-FFF2-40B4-BE49-F238E27FC236}">
-                <a16:creationId xmlns:a16="http://schemas.microsoft.com/office/drawing/2014/main" id="{30D57B6A-2486-46C4-A51B-00A68D845F29}"/>
+                <a16:creationId xmlns:a16="http://schemas.microsoft.com/office/drawing/2014/main" id="{1E63ABB5-2B9D-4DAC-8072-207A678B7F72}"/>
               </a:ext>
             </a:extLst>
           </p:cNvPr>
@@ -12072,7 +12272,7 @@
           <p:cNvPr id="6" name="">
             <a:extLst xmlns:a="http://schemas.openxmlformats.org/drawingml/2006/main">
               <a:ext uri="{FF2B5EF4-FFF2-40B4-BE49-F238E27FC236}">
-                <a16:creationId xmlns:a16="http://schemas.microsoft.com/office/drawing/2014/main" id="{A535AE85-AA53-4B3D-B7D4-755C0436BFE7}"/>
+                <a16:creationId xmlns:a16="http://schemas.microsoft.com/office/drawing/2014/main" id="{0FA2950E-90D3-4A10-A237-17B0F88672F1}"/>
               </a:ext>
             </a:extLst>
           </p:cNvPr>
@@ -12129,7 +12329,7 @@
           <p:cNvPr id="7" name="">
             <a:extLst xmlns:a="http://schemas.openxmlformats.org/drawingml/2006/main">
               <a:ext uri="{FF2B5EF4-FFF2-40B4-BE49-F238E27FC236}">
-                <a16:creationId xmlns:a16="http://schemas.microsoft.com/office/drawing/2014/main" id="{04867FBD-3DD9-4D6F-BD25-AE621128D702}"/>
+                <a16:creationId xmlns:a16="http://schemas.microsoft.com/office/drawing/2014/main" id="{59BA3682-BE0C-44CD-8EAA-6B5753F29EF3}"/>
               </a:ext>
             </a:extLst>
           </p:cNvPr>
@@ -12161,7 +12361,7 @@
           <p:cNvPr id="8" name="">
             <a:extLst xmlns:a="http://schemas.openxmlformats.org/drawingml/2006/main">
               <a:ext uri="{FF2B5EF4-FFF2-40B4-BE49-F238E27FC236}">
-                <a16:creationId xmlns:a16="http://schemas.microsoft.com/office/drawing/2014/main" id="{47528361-BE3B-45E4-AC4C-5CA917A411D1}"/>
+                <a16:creationId xmlns:a16="http://schemas.microsoft.com/office/drawing/2014/main" id="{FF41C612-1715-4E4C-9617-2BA992F57315}"/>
               </a:ext>
             </a:extLst>
           </p:cNvPr>
@@ -12218,7 +12418,7 @@
           <p:cNvPr id="9" name="">
             <a:extLst xmlns:a="http://schemas.openxmlformats.org/drawingml/2006/main">
               <a:ext uri="{FF2B5EF4-FFF2-40B4-BE49-F238E27FC236}">
-                <a16:creationId xmlns:a16="http://schemas.microsoft.com/office/drawing/2014/main" id="{087C71A7-ADFF-43F0-8E67-720A279E58D7}"/>
+                <a16:creationId xmlns:a16="http://schemas.microsoft.com/office/drawing/2014/main" id="{08660BAB-B44A-48BB-A398-526EB8F1C265}"/>
               </a:ext>
             </a:extLst>
           </p:cNvPr>
@@ -12275,7 +12475,7 @@
           <p:cNvPr id="10" name="">
             <a:extLst xmlns:a="http://schemas.openxmlformats.org/drawingml/2006/main">
               <a:ext uri="{FF2B5EF4-FFF2-40B4-BE49-F238E27FC236}">
-                <a16:creationId xmlns:a16="http://schemas.microsoft.com/office/drawing/2014/main" id="{99FE0086-341C-4175-94FA-8D095924BC79}"/>
+                <a16:creationId xmlns:a16="http://schemas.microsoft.com/office/drawing/2014/main" id="{68190F6F-D9ED-4232-A06F-E4439F357EA5}"/>
               </a:ext>
             </a:extLst>
           </p:cNvPr>
@@ -12309,7 +12509,7 @@
           <p:cNvPr id="11" name="">
             <a:extLst xmlns:a="http://schemas.openxmlformats.org/drawingml/2006/main">
               <a:ext uri="{FF2B5EF4-FFF2-40B4-BE49-F238E27FC236}">
-                <a16:creationId xmlns:a16="http://schemas.microsoft.com/office/drawing/2014/main" id="{E0BE5E43-8E81-44BD-826F-8CF94F52A94C}"/>
+                <a16:creationId xmlns:a16="http://schemas.microsoft.com/office/drawing/2014/main" id="{BE491CF2-8B06-4CF4-8DDB-DFE7BC086B85}"/>
               </a:ext>
             </a:extLst>
           </p:cNvPr>
@@ -12341,7 +12541,7 @@
           <p:cNvPr id="12" name="">
             <a:extLst xmlns:a="http://schemas.openxmlformats.org/drawingml/2006/main">
               <a:ext uri="{FF2B5EF4-FFF2-40B4-BE49-F238E27FC236}">
-                <a16:creationId xmlns:a16="http://schemas.microsoft.com/office/drawing/2014/main" id="{7BD276ED-6F12-4E86-8A50-F1FB6DB0ABCF}"/>
+                <a16:creationId xmlns:a16="http://schemas.microsoft.com/office/drawing/2014/main" id="{96476AE2-AF95-4CCD-964E-A32FF5444773}"/>
               </a:ext>
             </a:extLst>
           </p:cNvPr>
@@ -12398,7 +12598,7 @@
           <p:cNvPr id="13" name="">
             <a:extLst xmlns:a="http://schemas.openxmlformats.org/drawingml/2006/main">
               <a:ext uri="{FF2B5EF4-FFF2-40B4-BE49-F238E27FC236}">
-                <a16:creationId xmlns:a16="http://schemas.microsoft.com/office/drawing/2014/main" id="{F5D56811-EE20-4452-8C79-D61275E41537}"/>
+                <a16:creationId xmlns:a16="http://schemas.microsoft.com/office/drawing/2014/main" id="{0CFC73C4-058F-4610-A396-43B1B4FD302A}"/>
               </a:ext>
             </a:extLst>
           </p:cNvPr>
@@ -12455,7 +12655,7 @@
           <p:cNvPr id="14" name="">
             <a:extLst xmlns:a="http://schemas.openxmlformats.org/drawingml/2006/main">
               <a:ext uri="{FF2B5EF4-FFF2-40B4-BE49-F238E27FC236}">
-                <a16:creationId xmlns:a16="http://schemas.microsoft.com/office/drawing/2014/main" id="{3060210C-34B0-4DF2-8B77-89E9CBCD7DCB}"/>
+                <a16:creationId xmlns:a16="http://schemas.microsoft.com/office/drawing/2014/main" id="{B9BC9CD7-ECE1-46CB-B836-C16A313591C7}"/>
               </a:ext>
             </a:extLst>
           </p:cNvPr>
@@ -12489,7 +12689,7 @@
           <p:cNvPr id="15" name="">
             <a:extLst xmlns:a="http://schemas.openxmlformats.org/drawingml/2006/main">
               <a:ext uri="{FF2B5EF4-FFF2-40B4-BE49-F238E27FC236}">
-                <a16:creationId xmlns:a16="http://schemas.microsoft.com/office/drawing/2014/main" id="{94C647C0-11C5-483E-9B22-04509227F2C1}"/>
+                <a16:creationId xmlns:a16="http://schemas.microsoft.com/office/drawing/2014/main" id="{BC3DC48C-F4AB-4E7B-B82B-18ED2396CBD0}"/>
               </a:ext>
             </a:extLst>
           </p:cNvPr>
@@ -12521,7 +12721,7 @@
           <p:cNvPr id="16" name="">
             <a:extLst xmlns:a="http://schemas.openxmlformats.org/drawingml/2006/main">
               <a:ext uri="{FF2B5EF4-FFF2-40B4-BE49-F238E27FC236}">
-                <a16:creationId xmlns:a16="http://schemas.microsoft.com/office/drawing/2014/main" id="{FEE84A9E-ECFB-4225-A1CE-8530B9B93B09}"/>
+                <a16:creationId xmlns:a16="http://schemas.microsoft.com/office/drawing/2014/main" id="{185B3644-BC95-4F72-8DFB-17108E4D403E}"/>
               </a:ext>
             </a:extLst>
           </p:cNvPr>
@@ -12578,7 +12778,7 @@
           <p:cNvPr id="17" name="">
             <a:extLst xmlns:a="http://schemas.openxmlformats.org/drawingml/2006/main">
               <a:ext uri="{FF2B5EF4-FFF2-40B4-BE49-F238E27FC236}">
-                <a16:creationId xmlns:a16="http://schemas.microsoft.com/office/drawing/2014/main" id="{65C28529-C05E-4822-BEB9-2594B2E97802}"/>
+                <a16:creationId xmlns:a16="http://schemas.microsoft.com/office/drawing/2014/main" id="{5A260F73-DA6D-49EA-B80D-9CE4628AA05F}"/>
               </a:ext>
             </a:extLst>
           </p:cNvPr>
@@ -12635,7 +12835,7 @@
           <p:cNvPr id="18" name="">
             <a:extLst xmlns:a="http://schemas.openxmlformats.org/drawingml/2006/main">
               <a:ext uri="{FF2B5EF4-FFF2-40B4-BE49-F238E27FC236}">
-                <a16:creationId xmlns:a16="http://schemas.microsoft.com/office/drawing/2014/main" id="{2B90DBA4-B070-4794-AB4F-C1AFE312C1CA}"/>
+                <a16:creationId xmlns:a16="http://schemas.microsoft.com/office/drawing/2014/main" id="{9CB93C7D-BCF0-4B5E-91DC-A4AEB542B112}"/>
               </a:ext>
             </a:extLst>
           </p:cNvPr>
@@ -12669,7 +12869,7 @@
           <p:cNvPr id="19" name="">
             <a:extLst xmlns:a="http://schemas.openxmlformats.org/drawingml/2006/main">
               <a:ext uri="{FF2B5EF4-FFF2-40B4-BE49-F238E27FC236}">
-                <a16:creationId xmlns:a16="http://schemas.microsoft.com/office/drawing/2014/main" id="{E3018A03-70AC-4934-854D-4270BB506FCE}"/>
+                <a16:creationId xmlns:a16="http://schemas.microsoft.com/office/drawing/2014/main" id="{E0F34D4B-6394-4C22-BB12-495315FF1D69}"/>
               </a:ext>
             </a:extLst>
           </p:cNvPr>
@@ -12701,7 +12901,7 @@
           <p:cNvPr id="20" name="">
             <a:extLst xmlns:a="http://schemas.openxmlformats.org/drawingml/2006/main">
               <a:ext uri="{FF2B5EF4-FFF2-40B4-BE49-F238E27FC236}">
-                <a16:creationId xmlns:a16="http://schemas.microsoft.com/office/drawing/2014/main" id="{F8193547-E91B-4B33-B867-A80B1B2D50AD}"/>
+                <a16:creationId xmlns:a16="http://schemas.microsoft.com/office/drawing/2014/main" id="{59A55E87-931A-48EA-B15C-8ECED0F5B253}"/>
               </a:ext>
             </a:extLst>
           </p:cNvPr>
@@ -12758,7 +12958,7 @@
           <p:cNvPr id="21" name="">
             <a:extLst xmlns:a="http://schemas.openxmlformats.org/drawingml/2006/main">
               <a:ext uri="{FF2B5EF4-FFF2-40B4-BE49-F238E27FC236}">
-                <a16:creationId xmlns:a16="http://schemas.microsoft.com/office/drawing/2014/main" id="{8835A563-5917-4B90-8929-8757B59CA3DA}"/>
+                <a16:creationId xmlns:a16="http://schemas.microsoft.com/office/drawing/2014/main" id="{901BB2A6-2BDE-4B91-9273-F9C2A177D55C}"/>
               </a:ext>
             </a:extLst>
           </p:cNvPr>
@@ -12815,7 +13015,7 @@
           <p:cNvPr id="22" name="">
             <a:extLst xmlns:a="http://schemas.openxmlformats.org/drawingml/2006/main">
               <a:ext uri="{FF2B5EF4-FFF2-40B4-BE49-F238E27FC236}">
-                <a16:creationId xmlns:a16="http://schemas.microsoft.com/office/drawing/2014/main" id="{EE5D09AC-2F5D-4AAA-99D7-6A58950ED846}"/>
+                <a16:creationId xmlns:a16="http://schemas.microsoft.com/office/drawing/2014/main" id="{E614391E-3E9B-4828-A839-F967C4167AB7}"/>
               </a:ext>
             </a:extLst>
           </p:cNvPr>
@@ -12870,7 +13070,7 @@
     </p:spTree>
     <p:extLst>
       <p:ext uri="{BB962C8B-B14F-4D97-AF65-F5344CB8AC3E}">
-        <p14:creationId xmlns:p14="http://schemas.microsoft.com/office/powerpoint/2010/main" val="974631289"/>
+        <p14:creationId xmlns:p14="http://schemas.microsoft.com/office/powerpoint/2010/main" val="458899147"/>
       </p:ext>
     </p:extLst>
   </p:cSld>
@@ -13071,7 +13271,7 @@
           <p:cNvPr id="22" name="">
             <a:extLst xmlns:a="http://schemas.openxmlformats.org/drawingml/2006/main">
               <a:ext uri="{FF2B5EF4-FFF2-40B4-BE49-F238E27FC236}">
-                <a16:creationId xmlns:a16="http://schemas.microsoft.com/office/drawing/2014/main" id="{D62D7933-DC73-4156-81ED-867DB6D405BC}"/>
+                <a16:creationId xmlns:a16="http://schemas.microsoft.com/office/drawing/2014/main" id="{319F5348-3B21-410F-AF25-CD675373FE29}"/>
               </a:ext>
             </a:extLst>
           </p:cNvPr>
@@ -13103,7 +13303,7 @@
           <p:cNvPr id="2" name="">
             <a:extLst xmlns:a="http://schemas.openxmlformats.org/drawingml/2006/main">
               <a:ext uri="{FF2B5EF4-FFF2-40B4-BE49-F238E27FC236}">
-                <a16:creationId xmlns:a16="http://schemas.microsoft.com/office/drawing/2014/main" id="{E94B1347-1151-481A-8223-458106AAB17C}"/>
+                <a16:creationId xmlns:a16="http://schemas.microsoft.com/office/drawing/2014/main" id="{28E61116-36AD-49F3-9BA6-6FC39B321CA2}"/>
               </a:ext>
             </a:extLst>
           </p:cNvPr>
@@ -13160,7 +13360,7 @@
           <p:cNvPr id="3" name="">
             <a:extLst xmlns:a="http://schemas.openxmlformats.org/drawingml/2006/main">
               <a:ext uri="{FF2B5EF4-FFF2-40B4-BE49-F238E27FC236}">
-                <a16:creationId xmlns:a16="http://schemas.microsoft.com/office/drawing/2014/main" id="{7713BD7D-BDC7-41AA-8C9B-21CDE744586A}"/>
+                <a16:creationId xmlns:a16="http://schemas.microsoft.com/office/drawing/2014/main" id="{57CC312C-F8B3-4A17-B3B1-4EBAB18BFA16}"/>
               </a:ext>
             </a:extLst>
           </p:cNvPr>
@@ -13192,7 +13392,7 @@
           <p:cNvPr id="4" name="">
             <a:extLst xmlns:a="http://schemas.openxmlformats.org/drawingml/2006/main">
               <a:ext uri="{FF2B5EF4-FFF2-40B4-BE49-F238E27FC236}">
-                <a16:creationId xmlns:a16="http://schemas.microsoft.com/office/drawing/2014/main" id="{A45027BD-0AD2-4F37-A7BC-73B546059572}"/>
+                <a16:creationId xmlns:a16="http://schemas.microsoft.com/office/drawing/2014/main" id="{6D97041B-2B06-4D4B-99EE-24239585280F}"/>
               </a:ext>
             </a:extLst>
           </p:cNvPr>
@@ -13249,7 +13449,7 @@
           <p:cNvPr id="5" name="">
             <a:extLst xmlns:a="http://schemas.openxmlformats.org/drawingml/2006/main">
               <a:ext uri="{FF2B5EF4-FFF2-40B4-BE49-F238E27FC236}">
-                <a16:creationId xmlns:a16="http://schemas.microsoft.com/office/drawing/2014/main" id="{86DA9EB4-1874-46DD-87FB-D729EBC51317}"/>
+                <a16:creationId xmlns:a16="http://schemas.microsoft.com/office/drawing/2014/main" id="{2DF53606-97C7-4145-A279-7FFA5BBBA3DD}"/>
               </a:ext>
             </a:extLst>
           </p:cNvPr>
@@ -13306,7 +13506,7 @@
           <p:cNvPr id="6" name="">
             <a:extLst xmlns:a="http://schemas.openxmlformats.org/drawingml/2006/main">
               <a:ext uri="{FF2B5EF4-FFF2-40B4-BE49-F238E27FC236}">
-                <a16:creationId xmlns:a16="http://schemas.microsoft.com/office/drawing/2014/main" id="{4D75DAEA-AEC1-4FE9-A0CE-0B0E798E5C88}"/>
+                <a16:creationId xmlns:a16="http://schemas.microsoft.com/office/drawing/2014/main" id="{F5AC2508-7E09-4C5F-B0C3-EFD1DC04E7F1}"/>
               </a:ext>
             </a:extLst>
           </p:cNvPr>
@@ -13363,7 +13563,7 @@
           <p:cNvPr id="7" name="">
             <a:extLst xmlns:a="http://schemas.openxmlformats.org/drawingml/2006/main">
               <a:ext uri="{FF2B5EF4-FFF2-40B4-BE49-F238E27FC236}">
-                <a16:creationId xmlns:a16="http://schemas.microsoft.com/office/drawing/2014/main" id="{0BE14663-517E-4EA9-B519-341FE11B5702}"/>
+                <a16:creationId xmlns:a16="http://schemas.microsoft.com/office/drawing/2014/main" id="{8F58D4FD-A87D-4110-9635-CCC1CAD69EBC}"/>
               </a:ext>
             </a:extLst>
           </p:cNvPr>
@@ -13395,7 +13595,7 @@
           <p:cNvPr id="8" name="">
             <a:extLst xmlns:a="http://schemas.openxmlformats.org/drawingml/2006/main">
               <a:ext uri="{FF2B5EF4-FFF2-40B4-BE49-F238E27FC236}">
-                <a16:creationId xmlns:a16="http://schemas.microsoft.com/office/drawing/2014/main" id="{A63DC686-33FD-4A0E-841A-2CB314ECAD6A}"/>
+                <a16:creationId xmlns:a16="http://schemas.microsoft.com/office/drawing/2014/main" id="{395DC1CF-97EF-4AD9-B1D1-1E2318A9400C}"/>
               </a:ext>
             </a:extLst>
           </p:cNvPr>
@@ -13452,7 +13652,7 @@
           <p:cNvPr id="9" name="">
             <a:extLst xmlns:a="http://schemas.openxmlformats.org/drawingml/2006/main">
               <a:ext uri="{FF2B5EF4-FFF2-40B4-BE49-F238E27FC236}">
-                <a16:creationId xmlns:a16="http://schemas.microsoft.com/office/drawing/2014/main" id="{7F84A435-09AC-4CD9-A907-A3DA08A32445}"/>
+                <a16:creationId xmlns:a16="http://schemas.microsoft.com/office/drawing/2014/main" id="{3816291C-DF7B-4146-8F91-6815FA860496}"/>
               </a:ext>
             </a:extLst>
           </p:cNvPr>
@@ -13509,7 +13709,7 @@
           <p:cNvPr id="10" name="">
             <a:extLst xmlns:a="http://schemas.openxmlformats.org/drawingml/2006/main">
               <a:ext uri="{FF2B5EF4-FFF2-40B4-BE49-F238E27FC236}">
-                <a16:creationId xmlns:a16="http://schemas.microsoft.com/office/drawing/2014/main" id="{93812ED5-F974-458B-8341-BA3113844F39}"/>
+                <a16:creationId xmlns:a16="http://schemas.microsoft.com/office/drawing/2014/main" id="{CF05928D-0805-4EA1-82FC-40720C7BD579}"/>
               </a:ext>
             </a:extLst>
           </p:cNvPr>
@@ -13543,7 +13743,7 @@
           <p:cNvPr id="11" name="">
             <a:extLst xmlns:a="http://schemas.openxmlformats.org/drawingml/2006/main">
               <a:ext uri="{FF2B5EF4-FFF2-40B4-BE49-F238E27FC236}">
-                <a16:creationId xmlns:a16="http://schemas.microsoft.com/office/drawing/2014/main" id="{AC058D85-71A2-41A1-8C35-32D5038715F8}"/>
+                <a16:creationId xmlns:a16="http://schemas.microsoft.com/office/drawing/2014/main" id="{B0AE9833-929E-49ED-A261-014AA8A5DB75}"/>
               </a:ext>
             </a:extLst>
           </p:cNvPr>
@@ -13575,7 +13775,7 @@
           <p:cNvPr id="12" name="">
             <a:extLst xmlns:a="http://schemas.openxmlformats.org/drawingml/2006/main">
               <a:ext uri="{FF2B5EF4-FFF2-40B4-BE49-F238E27FC236}">
-                <a16:creationId xmlns:a16="http://schemas.microsoft.com/office/drawing/2014/main" id="{6D8FAB05-24A5-43B2-A8D1-5FB33DADB54F}"/>
+                <a16:creationId xmlns:a16="http://schemas.microsoft.com/office/drawing/2014/main" id="{3AE8CB74-24F3-46BB-B0FC-0F0F7444BE75}"/>
               </a:ext>
             </a:extLst>
           </p:cNvPr>
@@ -13632,7 +13832,7 @@
           <p:cNvPr id="13" name="">
             <a:extLst xmlns:a="http://schemas.openxmlformats.org/drawingml/2006/main">
               <a:ext uri="{FF2B5EF4-FFF2-40B4-BE49-F238E27FC236}">
-                <a16:creationId xmlns:a16="http://schemas.microsoft.com/office/drawing/2014/main" id="{FCA32CE2-0BF5-404A-907F-1B039528C388}"/>
+                <a16:creationId xmlns:a16="http://schemas.microsoft.com/office/drawing/2014/main" id="{DF6EBA3C-BB2C-412B-B3AC-B9C734947DC3}"/>
               </a:ext>
             </a:extLst>
           </p:cNvPr>
@@ -13689,7 +13889,7 @@
           <p:cNvPr id="14" name="">
             <a:extLst xmlns:a="http://schemas.openxmlformats.org/drawingml/2006/main">
               <a:ext uri="{FF2B5EF4-FFF2-40B4-BE49-F238E27FC236}">
-                <a16:creationId xmlns:a16="http://schemas.microsoft.com/office/drawing/2014/main" id="{7DD94717-B131-41A0-A878-5D87F181D659}"/>
+                <a16:creationId xmlns:a16="http://schemas.microsoft.com/office/drawing/2014/main" id="{EF3E471A-4BA2-4F63-9817-AA0F61DAA9EA}"/>
               </a:ext>
             </a:extLst>
           </p:cNvPr>
@@ -13723,7 +13923,7 @@
           <p:cNvPr id="15" name="">
             <a:extLst xmlns:a="http://schemas.openxmlformats.org/drawingml/2006/main">
               <a:ext uri="{FF2B5EF4-FFF2-40B4-BE49-F238E27FC236}">
-                <a16:creationId xmlns:a16="http://schemas.microsoft.com/office/drawing/2014/main" id="{CD2662B2-931F-493D-BC63-EA28601D6A82}"/>
+                <a16:creationId xmlns:a16="http://schemas.microsoft.com/office/drawing/2014/main" id="{D2C114C3-FCCF-4DC6-B955-ABBADC318385}"/>
               </a:ext>
             </a:extLst>
           </p:cNvPr>
@@ -13755,7 +13955,7 @@
           <p:cNvPr id="16" name="">
             <a:extLst xmlns:a="http://schemas.openxmlformats.org/drawingml/2006/main">
               <a:ext uri="{FF2B5EF4-FFF2-40B4-BE49-F238E27FC236}">
-                <a16:creationId xmlns:a16="http://schemas.microsoft.com/office/drawing/2014/main" id="{E830E0C1-A5F0-473B-BEF1-96D177DEABCC}"/>
+                <a16:creationId xmlns:a16="http://schemas.microsoft.com/office/drawing/2014/main" id="{3D335131-BA10-4EFE-A4C2-0CF5903034CA}"/>
               </a:ext>
             </a:extLst>
           </p:cNvPr>
@@ -13812,7 +14012,7 @@
           <p:cNvPr id="17" name="">
             <a:extLst xmlns:a="http://schemas.openxmlformats.org/drawingml/2006/main">
               <a:ext uri="{FF2B5EF4-FFF2-40B4-BE49-F238E27FC236}">
-                <a16:creationId xmlns:a16="http://schemas.microsoft.com/office/drawing/2014/main" id="{FC80FD39-67E2-40CE-A68A-4002089525C8}"/>
+                <a16:creationId xmlns:a16="http://schemas.microsoft.com/office/drawing/2014/main" id="{2FDF631E-47A5-4EAA-A696-564C18D09712}"/>
               </a:ext>
             </a:extLst>
           </p:cNvPr>
@@ -13869,7 +14069,7 @@
           <p:cNvPr id="18" name="">
             <a:extLst xmlns:a="http://schemas.openxmlformats.org/drawingml/2006/main">
               <a:ext uri="{FF2B5EF4-FFF2-40B4-BE49-F238E27FC236}">
-                <a16:creationId xmlns:a16="http://schemas.microsoft.com/office/drawing/2014/main" id="{36E0AB86-F13A-4933-908D-8B792647DB5B}"/>
+                <a16:creationId xmlns:a16="http://schemas.microsoft.com/office/drawing/2014/main" id="{8DDE73EB-B62C-48CC-96D5-7F6B77232EB5}"/>
               </a:ext>
             </a:extLst>
           </p:cNvPr>
@@ -13903,7 +14103,7 @@
           <p:cNvPr id="19" name="">
             <a:extLst xmlns:a="http://schemas.openxmlformats.org/drawingml/2006/main">
               <a:ext uri="{FF2B5EF4-FFF2-40B4-BE49-F238E27FC236}">
-                <a16:creationId xmlns:a16="http://schemas.microsoft.com/office/drawing/2014/main" id="{CDB03E04-13B7-42B7-B2CF-055D94488A83}"/>
+                <a16:creationId xmlns:a16="http://schemas.microsoft.com/office/drawing/2014/main" id="{8C83C66E-6F76-4B4B-ACC0-3C60479434A7}"/>
               </a:ext>
             </a:extLst>
           </p:cNvPr>
@@ -13935,7 +14135,7 @@
           <p:cNvPr id="20" name="">
             <a:extLst xmlns:a="http://schemas.openxmlformats.org/drawingml/2006/main">
               <a:ext uri="{FF2B5EF4-FFF2-40B4-BE49-F238E27FC236}">
-                <a16:creationId xmlns:a16="http://schemas.microsoft.com/office/drawing/2014/main" id="{D7D2F42C-BE2A-435B-AA1E-CA6A3BC98702}"/>
+                <a16:creationId xmlns:a16="http://schemas.microsoft.com/office/drawing/2014/main" id="{94BD0AC9-EFD6-416D-8841-F1CF6AC246DD}"/>
               </a:ext>
             </a:extLst>
           </p:cNvPr>
@@ -13992,7 +14192,7 @@
           <p:cNvPr id="21" name="">
             <a:extLst xmlns:a="http://schemas.openxmlformats.org/drawingml/2006/main">
               <a:ext uri="{FF2B5EF4-FFF2-40B4-BE49-F238E27FC236}">
-                <a16:creationId xmlns:a16="http://schemas.microsoft.com/office/drawing/2014/main" id="{4B7FA224-200E-40BF-8274-29663F53C519}"/>
+                <a16:creationId xmlns:a16="http://schemas.microsoft.com/office/drawing/2014/main" id="{436BE691-56C0-48A0-87FB-36B7A201F103}"/>
               </a:ext>
             </a:extLst>
           </p:cNvPr>
@@ -14047,7 +14247,7 @@
     </p:spTree>
     <p:extLst>
       <p:ext uri="{BB962C8B-B14F-4D97-AF65-F5344CB8AC3E}">
-        <p14:creationId xmlns:p14="http://schemas.microsoft.com/office/powerpoint/2010/main" val="1137317054"/>
+        <p14:creationId xmlns:p14="http://schemas.microsoft.com/office/powerpoint/2010/main" val="1421908091"/>
       </p:ext>
     </p:extLst>
   </p:cSld>
